--- a/Pendiente/EDA - Alquileres Málaga - 2025.pptx
+++ b/Pendiente/EDA - Alquileres Málaga - 2025.pptx
@@ -4213,12 +4213,83 @@
           <a:chExt cx="0" cy="0"/>
         </a:xfrm>
       </p:grpSpPr>
+      <p:sp>
+        <p:nvSpPr>
+          <p:cNvPr id="10" name="CuadroTexto 9">
+            <a:extLst>
+              <a:ext uri="{FF2B5EF4-FFF2-40B4-BE49-F238E27FC236}">
+                <a16:creationId xmlns:a16="http://schemas.microsoft.com/office/drawing/2014/main" id="{22959188-5AAA-1268-4D83-86A2EF5E759B}"/>
+              </a:ext>
+            </a:extLst>
+          </p:cNvPr>
+          <p:cNvSpPr txBox="1"/>
+          <p:nvPr/>
+        </p:nvSpPr>
+        <p:spPr>
+          <a:xfrm>
+            <a:off x="6815577" y="1221555"/>
+            <a:ext cx="4440025" cy="3139321"/>
+          </a:xfrm>
+          <a:prstGeom prst="rect">
+            <a:avLst/>
+          </a:prstGeom>
+          <a:noFill/>
+        </p:spPr>
+        <p:txBody>
+          <a:bodyPr wrap="square">
+            <a:spAutoFit/>
+          </a:bodyPr>
+          <a:lstStyle/>
+          <a:p>
+            <a:pPr algn="just"/>
+            <a:r>
+              <a:rPr lang="es-ES" dirty="0"/>
+              <a:t>Los gráficos muestran que el </a:t>
+            </a:r>
+            <a:r>
+              <a:rPr lang="es-ES" b="1" dirty="0"/>
+              <a:t>precio medio por barrio</a:t>
+            </a:r>
+            <a:r>
+              <a:rPr lang="es-ES" dirty="0"/>
+              <a:t> es más alto en el Este, mientras que el </a:t>
+            </a:r>
+            <a:r>
+              <a:rPr lang="es-ES" b="1" dirty="0"/>
+              <a:t>Centro</a:t>
+            </a:r>
+            <a:r>
+              <a:rPr lang="es-ES" dirty="0"/>
+              <a:t>, aunque no es el más caro, sí concentra la mayor actividad y densidad de alojamientos. </a:t>
+            </a:r>
+          </a:p>
+          <a:p>
+            <a:pPr algn="just"/>
+            <a:endParaRPr lang="es-ES" dirty="0"/>
+          </a:p>
+          <a:p>
+            <a:pPr algn="just"/>
+            <a:r>
+              <a:rPr lang="es-ES" dirty="0"/>
+              <a:t>Al analizar el </a:t>
+            </a:r>
+            <a:r>
+              <a:rPr lang="es-ES" b="1" dirty="0"/>
+              <a:t>precio medio por persona</a:t>
+            </a:r>
+            <a:r>
+              <a:rPr lang="es-ES" dirty="0"/>
+              <a:t>, el Centro supera ligeramente al Este, lo que sugiere que los alojamientos céntricos suelen estar optimizados para grupos más pequeños. </a:t>
+            </a:r>
+          </a:p>
+        </p:txBody>
+      </p:sp>
       <p:pic>
         <p:nvPicPr>
-          <p:cNvPr id="5" name="Imagen 4">
-            <a:extLst>
-              <a:ext uri="{FF2B5EF4-FFF2-40B4-BE49-F238E27FC236}">
-                <a16:creationId xmlns:a16="http://schemas.microsoft.com/office/drawing/2014/main" id="{C5DFD119-157F-8BEE-CA16-7AC1259CFA5D}"/>
+          <p:cNvPr id="3" name="Imagen 2">
+            <a:extLst>
+              <a:ext uri="{FF2B5EF4-FFF2-40B4-BE49-F238E27FC236}">
+                <a16:creationId xmlns:a16="http://schemas.microsoft.com/office/drawing/2014/main" id="{DAE7A1E0-50B3-600D-739C-A6D644FBB5BB}"/>
               </a:ext>
             </a:extLst>
           </p:cNvPr>
@@ -4235,8 +4306,8 @@
         </p:blipFill>
         <p:spPr>
           <a:xfrm>
-            <a:off x="354902" y="377072"/>
-            <a:ext cx="5628261" cy="2768814"/>
+            <a:off x="322333" y="509128"/>
+            <a:ext cx="5896175" cy="2943340"/>
           </a:xfrm>
           <a:prstGeom prst="rect">
             <a:avLst/>
@@ -4245,10 +4316,10 @@
       </p:pic>
       <p:pic>
         <p:nvPicPr>
-          <p:cNvPr id="7" name="Imagen 6">
-            <a:extLst>
-              <a:ext uri="{FF2B5EF4-FFF2-40B4-BE49-F238E27FC236}">
-                <a16:creationId xmlns:a16="http://schemas.microsoft.com/office/drawing/2014/main" id="{11032EEA-B7D7-9BA1-ADF0-66C5BDFB0F03}"/>
+          <p:cNvPr id="6" name="Imagen 5">
+            <a:extLst>
+              <a:ext uri="{FF2B5EF4-FFF2-40B4-BE49-F238E27FC236}">
+                <a16:creationId xmlns:a16="http://schemas.microsoft.com/office/drawing/2014/main" id="{3AC775A1-289E-0F27-24BE-CE7E24298F7A}"/>
               </a:ext>
             </a:extLst>
           </p:cNvPr>
@@ -4265,85 +4336,14 @@
         </p:blipFill>
         <p:spPr>
           <a:xfrm>
-            <a:off x="218638" y="3266878"/>
-            <a:ext cx="5900787" cy="2943340"/>
+            <a:off x="397748" y="3635012"/>
+            <a:ext cx="5900763" cy="2943340"/>
           </a:xfrm>
           <a:prstGeom prst="rect">
             <a:avLst/>
           </a:prstGeom>
         </p:spPr>
       </p:pic>
-      <p:sp>
-        <p:nvSpPr>
-          <p:cNvPr id="10" name="CuadroTexto 9">
-            <a:extLst>
-              <a:ext uri="{FF2B5EF4-FFF2-40B4-BE49-F238E27FC236}">
-                <a16:creationId xmlns:a16="http://schemas.microsoft.com/office/drawing/2014/main" id="{22959188-5AAA-1268-4D83-86A2EF5E759B}"/>
-              </a:ext>
-            </a:extLst>
-          </p:cNvPr>
-          <p:cNvSpPr txBox="1"/>
-          <p:nvPr/>
-        </p:nvSpPr>
-        <p:spPr>
-          <a:xfrm>
-            <a:off x="6815577" y="1221555"/>
-            <a:ext cx="4440025" cy="3139321"/>
-          </a:xfrm>
-          <a:prstGeom prst="rect">
-            <a:avLst/>
-          </a:prstGeom>
-          <a:noFill/>
-        </p:spPr>
-        <p:txBody>
-          <a:bodyPr wrap="square">
-            <a:spAutoFit/>
-          </a:bodyPr>
-          <a:lstStyle/>
-          <a:p>
-            <a:pPr algn="just"/>
-            <a:r>
-              <a:rPr lang="es-ES" dirty="0"/>
-              <a:t>Los gráficos muestran que el </a:t>
-            </a:r>
-            <a:r>
-              <a:rPr lang="es-ES" b="1" dirty="0"/>
-              <a:t>precio medio por barrio</a:t>
-            </a:r>
-            <a:r>
-              <a:rPr lang="es-ES" dirty="0"/>
-              <a:t> es más alto en el Este, mientras que el </a:t>
-            </a:r>
-            <a:r>
-              <a:rPr lang="es-ES" b="1" dirty="0"/>
-              <a:t>Centro</a:t>
-            </a:r>
-            <a:r>
-              <a:rPr lang="es-ES" dirty="0"/>
-              <a:t>, aunque no es el más caro, sí concentra la mayor actividad y densidad de alojamientos. </a:t>
-            </a:r>
-          </a:p>
-          <a:p>
-            <a:pPr algn="just"/>
-            <a:endParaRPr lang="es-ES" dirty="0"/>
-          </a:p>
-          <a:p>
-            <a:pPr algn="just"/>
-            <a:r>
-              <a:rPr lang="es-ES" dirty="0"/>
-              <a:t>Al analizar el </a:t>
-            </a:r>
-            <a:r>
-              <a:rPr lang="es-ES" b="1" dirty="0"/>
-              <a:t>precio medio por persona</a:t>
-            </a:r>
-            <a:r>
-              <a:rPr lang="es-ES" dirty="0"/>
-              <a:t>, el Centro supera ligeramente al Este, lo que sugiere que los alojamientos céntricos suelen estar optimizados para grupos más pequeños. </a:t>
-            </a:r>
-          </a:p>
-        </p:txBody>
-      </p:sp>
     </p:spTree>
     <p:extLst>
       <p:ext uri="{BB962C8B-B14F-4D97-AF65-F5344CB8AC3E}">

--- a/Pendiente/EDA - Alquileres Málaga - 2025.pptx
+++ b/Pendiente/EDA - Alquileres Málaga - 2025.pptx
@@ -8,11 +8,9 @@
     <p:sldId id="262" r:id="rId2"/>
     <p:sldId id="264" r:id="rId3"/>
     <p:sldId id="258" r:id="rId4"/>
-    <p:sldId id="265" r:id="rId5"/>
-    <p:sldId id="266" r:id="rId6"/>
-    <p:sldId id="268" r:id="rId7"/>
-    <p:sldId id="261" r:id="rId8"/>
-    <p:sldId id="267" r:id="rId9"/>
+    <p:sldId id="268" r:id="rId5"/>
+    <p:sldId id="267" r:id="rId6"/>
+    <p:sldId id="269" r:id="rId7"/>
   </p:sldIdLst>
   <p:sldSz cx="12192000" cy="6858000"/>
   <p:notesSz cx="6858000" cy="9144000"/>
@@ -266,7 +264,7 @@
           <a:p>
             <a:fld id="{85B43D43-1142-4D3A-930C-AC128EFD48D7}" type="datetimeFigureOut">
               <a:rPr lang="es-ES" smtClean="0"/>
-              <a:t>18/05/2026</a:t>
+              <a:t>21/05/2026</a:t>
             </a:fld>
             <a:endParaRPr lang="es-ES"/>
           </a:p>
@@ -464,7 +462,7 @@
           <a:p>
             <a:fld id="{85B43D43-1142-4D3A-930C-AC128EFD48D7}" type="datetimeFigureOut">
               <a:rPr lang="es-ES" smtClean="0"/>
-              <a:t>18/05/2026</a:t>
+              <a:t>21/05/2026</a:t>
             </a:fld>
             <a:endParaRPr lang="es-ES"/>
           </a:p>
@@ -672,7 +670,7 @@
           <a:p>
             <a:fld id="{85B43D43-1142-4D3A-930C-AC128EFD48D7}" type="datetimeFigureOut">
               <a:rPr lang="es-ES" smtClean="0"/>
-              <a:t>18/05/2026</a:t>
+              <a:t>21/05/2026</a:t>
             </a:fld>
             <a:endParaRPr lang="es-ES"/>
           </a:p>
@@ -870,7 +868,7 @@
           <a:p>
             <a:fld id="{85B43D43-1142-4D3A-930C-AC128EFD48D7}" type="datetimeFigureOut">
               <a:rPr lang="es-ES" smtClean="0"/>
-              <a:t>18/05/2026</a:t>
+              <a:t>21/05/2026</a:t>
             </a:fld>
             <a:endParaRPr lang="es-ES"/>
           </a:p>
@@ -1145,7 +1143,7 @@
           <a:p>
             <a:fld id="{85B43D43-1142-4D3A-930C-AC128EFD48D7}" type="datetimeFigureOut">
               <a:rPr lang="es-ES" smtClean="0"/>
-              <a:t>18/05/2026</a:t>
+              <a:t>21/05/2026</a:t>
             </a:fld>
             <a:endParaRPr lang="es-ES"/>
           </a:p>
@@ -1410,7 +1408,7 @@
           <a:p>
             <a:fld id="{85B43D43-1142-4D3A-930C-AC128EFD48D7}" type="datetimeFigureOut">
               <a:rPr lang="es-ES" smtClean="0"/>
-              <a:t>18/05/2026</a:t>
+              <a:t>21/05/2026</a:t>
             </a:fld>
             <a:endParaRPr lang="es-ES"/>
           </a:p>
@@ -1822,7 +1820,7 @@
           <a:p>
             <a:fld id="{85B43D43-1142-4D3A-930C-AC128EFD48D7}" type="datetimeFigureOut">
               <a:rPr lang="es-ES" smtClean="0"/>
-              <a:t>18/05/2026</a:t>
+              <a:t>21/05/2026</a:t>
             </a:fld>
             <a:endParaRPr lang="es-ES"/>
           </a:p>
@@ -1963,7 +1961,7 @@
           <a:p>
             <a:fld id="{85B43D43-1142-4D3A-930C-AC128EFD48D7}" type="datetimeFigureOut">
               <a:rPr lang="es-ES" smtClean="0"/>
-              <a:t>18/05/2026</a:t>
+              <a:t>21/05/2026</a:t>
             </a:fld>
             <a:endParaRPr lang="es-ES"/>
           </a:p>
@@ -2076,7 +2074,7 @@
           <a:p>
             <a:fld id="{85B43D43-1142-4D3A-930C-AC128EFD48D7}" type="datetimeFigureOut">
               <a:rPr lang="es-ES" smtClean="0"/>
-              <a:t>18/05/2026</a:t>
+              <a:t>21/05/2026</a:t>
             </a:fld>
             <a:endParaRPr lang="es-ES"/>
           </a:p>
@@ -2387,7 +2385,7 @@
           <a:p>
             <a:fld id="{85B43D43-1142-4D3A-930C-AC128EFD48D7}" type="datetimeFigureOut">
               <a:rPr lang="es-ES" smtClean="0"/>
-              <a:t>18/05/2026</a:t>
+              <a:t>21/05/2026</a:t>
             </a:fld>
             <a:endParaRPr lang="es-ES"/>
           </a:p>
@@ -2675,7 +2673,7 @@
           <a:p>
             <a:fld id="{85B43D43-1142-4D3A-930C-AC128EFD48D7}" type="datetimeFigureOut">
               <a:rPr lang="es-ES" smtClean="0"/>
-              <a:t>18/05/2026</a:t>
+              <a:t>21/05/2026</a:t>
             </a:fld>
             <a:endParaRPr lang="es-ES"/>
           </a:p>
@@ -2916,7 +2914,7 @@
           <a:p>
             <a:fld id="{85B43D43-1142-4D3A-930C-AC128EFD48D7}" type="datetimeFigureOut">
               <a:rPr lang="es-ES" smtClean="0"/>
-              <a:t>18/05/2026</a:t>
+              <a:t>21/05/2026</a:t>
             </a:fld>
             <a:endParaRPr lang="es-ES"/>
           </a:p>
@@ -3373,10 +3371,10 @@
       </p:sp>
       <p:sp>
         <p:nvSpPr>
-          <p:cNvPr id="5" name="CuadroTexto 4">
-            <a:extLst>
-              <a:ext uri="{FF2B5EF4-FFF2-40B4-BE49-F238E27FC236}">
-                <a16:creationId xmlns:a16="http://schemas.microsoft.com/office/drawing/2014/main" id="{EB12CEDA-E902-2EAA-9E58-FF4DF0D5A2C4}"/>
+          <p:cNvPr id="6" name="CuadroTexto 5">
+            <a:extLst>
+              <a:ext uri="{FF2B5EF4-FFF2-40B4-BE49-F238E27FC236}">
+                <a16:creationId xmlns:a16="http://schemas.microsoft.com/office/drawing/2014/main" id="{060185BA-C508-9494-C4DB-0CAA584C1CA9}"/>
               </a:ext>
             </a:extLst>
           </p:cNvPr>
@@ -3385,8 +3383,8 @@
         </p:nvSpPr>
         <p:spPr>
           <a:xfrm>
-            <a:off x="564823" y="3737976"/>
-            <a:ext cx="9993198" cy="1477328"/>
+            <a:off x="564822" y="2236585"/>
+            <a:ext cx="10596513" cy="3416320"/>
           </a:xfrm>
           <a:prstGeom prst="rect">
             <a:avLst/>
@@ -3399,7 +3397,45 @@
           </a:bodyPr>
           <a:lstStyle/>
           <a:p>
+            <a:pPr marL="285750" indent="-285750" algn="just">
+              <a:buFont typeface="Wingdings" panose="05000000000000000000" pitchFamily="2" charset="2"/>
+              <a:buChar char="q"/>
+            </a:pPr>
+            <a:r>
+              <a:rPr lang="es-ES" b="1" dirty="0"/>
+              <a:t>Objetivo principal: </a:t>
+            </a:r>
+          </a:p>
+          <a:p>
             <a:pPr algn="just"/>
+            <a:endParaRPr lang="es-ES" b="1" dirty="0"/>
+          </a:p>
+          <a:p>
+            <a:pPr algn="just"/>
+            <a:r>
+              <a:rPr lang="es-ES" dirty="0"/>
+              <a:t>Entender los factores que influyen en el precio, la oferta y la demanda de alojamientos turísticos en Málaga.</a:t>
+            </a:r>
+          </a:p>
+          <a:p>
+            <a:pPr marL="285750" indent="-285750" algn="just">
+              <a:buFont typeface="Wingdings" panose="05000000000000000000" pitchFamily="2" charset="2"/>
+              <a:buChar char="q"/>
+            </a:pPr>
+            <a:endParaRPr lang="es-ES" dirty="0"/>
+          </a:p>
+          <a:p>
+            <a:pPr marL="285750" indent="-285750" algn="just">
+              <a:buFont typeface="Wingdings" panose="05000000000000000000" pitchFamily="2" charset="2"/>
+              <a:buChar char="q"/>
+            </a:pPr>
+            <a:endParaRPr lang="es-ES" dirty="0"/>
+          </a:p>
+          <a:p>
+            <a:pPr marL="285750" indent="-285750" algn="just">
+              <a:buFont typeface="Wingdings" panose="05000000000000000000" pitchFamily="2" charset="2"/>
+              <a:buChar char="q"/>
+            </a:pPr>
             <a:r>
               <a:rPr lang="es-ES" b="1" dirty="0"/>
               <a:t>Objetivos específicos:</a:t>
@@ -3407,8 +3443,15 @@
           </a:p>
           <a:p>
             <a:pPr marL="285750" indent="-285750" algn="just">
-              <a:buFont typeface="Arial" panose="020B0604020202020204" pitchFamily="34" charset="0"/>
-              <a:buChar char="•"/>
+              <a:buFont typeface="Wingdings" panose="05000000000000000000" pitchFamily="2" charset="2"/>
+              <a:buChar char="q"/>
+            </a:pPr>
+            <a:endParaRPr lang="es-ES" b="1" dirty="0"/>
+          </a:p>
+          <a:p>
+            <a:pPr marL="742950" lvl="1" indent="-285750" algn="just">
+              <a:buFont typeface="Wingdings" panose="05000000000000000000" pitchFamily="2" charset="2"/>
+              <a:buChar char="Ø"/>
             </a:pPr>
             <a:r>
               <a:rPr lang="es-ES" dirty="0"/>
@@ -3416,9 +3459,9 @@
             </a:r>
           </a:p>
           <a:p>
-            <a:pPr marL="285750" indent="-285750" algn="just">
-              <a:buFont typeface="Arial" panose="020B0604020202020204" pitchFamily="34" charset="0"/>
-              <a:buChar char="•"/>
+            <a:pPr marL="742950" lvl="1" indent="-285750" algn="just">
+              <a:buFont typeface="Wingdings" panose="05000000000000000000" pitchFamily="2" charset="2"/>
+              <a:buChar char="Ø"/>
             </a:pPr>
             <a:r>
               <a:rPr lang="es-ES" dirty="0"/>
@@ -3426,9 +3469,9 @@
             </a:r>
           </a:p>
           <a:p>
-            <a:pPr marL="285750" indent="-285750" algn="just">
-              <a:buFont typeface="Arial" panose="020B0604020202020204" pitchFamily="34" charset="0"/>
-              <a:buChar char="•"/>
+            <a:pPr marL="742950" lvl="1" indent="-285750" algn="just">
+              <a:buFont typeface="Wingdings" panose="05000000000000000000" pitchFamily="2" charset="2"/>
+              <a:buChar char="Ø"/>
             </a:pPr>
             <a:r>
               <a:rPr lang="es-ES" dirty="0"/>
@@ -3436,57 +3479,18 @@
             </a:r>
           </a:p>
           <a:p>
-            <a:pPr marL="285750" indent="-285750" algn="just">
-              <a:buFont typeface="Arial" panose="020B0604020202020204" pitchFamily="34" charset="0"/>
-              <a:buChar char="•"/>
+            <a:pPr marL="742950" lvl="1" indent="-285750" algn="just">
+              <a:buFont typeface="Wingdings" panose="05000000000000000000" pitchFamily="2" charset="2"/>
+              <a:buChar char="Ø"/>
             </a:pPr>
             <a:r>
               <a:rPr lang="es-ES" dirty="0"/>
               <a:t>Formular y contrastar 3 hipótesis basadas en los datos.</a:t>
             </a:r>
           </a:p>
-        </p:txBody>
-      </p:sp>
-      <p:sp>
-        <p:nvSpPr>
-          <p:cNvPr id="6" name="CuadroTexto 5">
-            <a:extLst>
-              <a:ext uri="{FF2B5EF4-FFF2-40B4-BE49-F238E27FC236}">
-                <a16:creationId xmlns:a16="http://schemas.microsoft.com/office/drawing/2014/main" id="{060185BA-C508-9494-C4DB-0CAA584C1CA9}"/>
-              </a:ext>
-            </a:extLst>
-          </p:cNvPr>
-          <p:cNvSpPr txBox="1"/>
-          <p:nvPr/>
-        </p:nvSpPr>
-        <p:spPr>
-          <a:xfrm>
-            <a:off x="564822" y="2236585"/>
-            <a:ext cx="10596513" cy="646331"/>
-          </a:xfrm>
-          <a:prstGeom prst="rect">
-            <a:avLst/>
-          </a:prstGeom>
-          <a:noFill/>
-        </p:spPr>
-        <p:txBody>
-          <a:bodyPr wrap="square">
-            <a:spAutoFit/>
-          </a:bodyPr>
-          <a:lstStyle/>
           <a:p>
             <a:pPr algn="just"/>
-            <a:r>
-              <a:rPr lang="es-ES" b="1" dirty="0"/>
-              <a:t>Objetivo principal: </a:t>
-            </a:r>
-          </a:p>
-          <a:p>
-            <a:pPr algn="just"/>
-            <a:r>
-              <a:rPr lang="es-ES" dirty="0"/>
-              <a:t>Entender los factores que influyen en el precio, la oferta y la demanda de alojamientos turísticos en Málaga.</a:t>
-            </a:r>
+            <a:endParaRPr lang="es-ES" dirty="0"/>
           </a:p>
         </p:txBody>
       </p:sp>
@@ -3703,39 +3707,20 @@
           <a:p>
             <a:pPr algn="just"/>
             <a:r>
-              <a:rPr lang="es-ES" sz="2000" b="1" dirty="0">
+              <a:rPr lang="es-ES" sz="2900" b="1" dirty="0">
                 <a:latin typeface="+mn-lt"/>
                 <a:ea typeface="+mn-ea"/>
                 <a:cs typeface="+mn-cs"/>
               </a:rPr>
-              <a:t>HIPÓTESIS 1: “</a:t>
-            </a:r>
-            <a:r>
-              <a:rPr lang="es-ES" sz="2000" dirty="0">
+              <a:t>HIPÓTESIS 1: </a:t>
+            </a:r>
+            <a:r>
+              <a:rPr lang="es-ES" sz="2900" b="1" i="1" dirty="0">
                 <a:latin typeface="+mn-lt"/>
                 <a:ea typeface="+mn-ea"/>
                 <a:cs typeface="+mn-cs"/>
               </a:rPr>
-              <a:t>Los alojamientos ubicados en el Centro tienen precios más altos que los alojamientos del resto de barrios.”</a:t>
-            </a:r>
-          </a:p>
-          <a:p>
-            <a:pPr algn="just"/>
-            <a:endParaRPr lang="es-ES" sz="2000" dirty="0">
-              <a:latin typeface="+mn-lt"/>
-              <a:ea typeface="+mn-ea"/>
-              <a:cs typeface="+mn-cs"/>
-            </a:endParaRPr>
-          </a:p>
-          <a:p>
-            <a:pPr algn="just"/>
-            <a:r>
-              <a:rPr lang="es-ES" sz="2000" dirty="0">
-                <a:latin typeface="+mn-lt"/>
-                <a:ea typeface="+mn-ea"/>
-                <a:cs typeface="+mn-cs"/>
-              </a:rPr>
-              <a:t>Análisis de precios, oferta y localización en Airbnb Málaga</a:t>
+              <a:t>“Los alojamientos ubicados en el Centro tienen precios más altos que los alojamientos del resto de barrios.”</a:t>
             </a:r>
           </a:p>
         </p:txBody>
@@ -3755,7 +3740,7 @@
         <p:spPr>
           <a:xfrm>
             <a:off x="838200" y="2201061"/>
-            <a:ext cx="10046615" cy="3139321"/>
+            <a:ext cx="10046615" cy="3631763"/>
           </a:xfrm>
           <a:prstGeom prst="rect">
             <a:avLst/>
@@ -3772,7 +3757,7 @@
               <a:buNone/>
             </a:pPr>
             <a:r>
-              <a:rPr lang="es-ES" b="1" dirty="0"/>
+              <a:rPr lang="es-ES" sz="3200" b="1" dirty="0"/>
               <a:t>PLANTEAMIENTO</a:t>
             </a:r>
           </a:p>
@@ -3783,8 +3768,9 @@
             <a:endParaRPr lang="es-ES" b="1" dirty="0"/>
           </a:p>
           <a:p>
-            <a:pPr algn="just">
-              <a:buNone/>
+            <a:pPr marL="285750" indent="-285750" algn="just">
+              <a:buFont typeface="Wingdings" panose="05000000000000000000" pitchFamily="2" charset="2"/>
+              <a:buChar char="q"/>
             </a:pPr>
             <a:r>
               <a:rPr lang="es-ES" b="1" dirty="0">
@@ -3800,14 +3786,16 @@
             </a:r>
           </a:p>
           <a:p>
-            <a:pPr algn="just">
-              <a:buNone/>
+            <a:pPr marL="285750" indent="-285750" algn="just">
+              <a:buFont typeface="Wingdings" panose="05000000000000000000" pitchFamily="2" charset="2"/>
+              <a:buChar char="q"/>
             </a:pPr>
             <a:endParaRPr lang="es-ES" dirty="0"/>
           </a:p>
           <a:p>
-            <a:pPr algn="just">
-              <a:buNone/>
+            <a:pPr marL="285750" indent="-285750" algn="just">
+              <a:buFont typeface="Wingdings" panose="05000000000000000000" pitchFamily="2" charset="2"/>
+              <a:buChar char="q"/>
             </a:pPr>
             <a:r>
               <a:rPr lang="es-ES" b="1" dirty="0">
@@ -3821,12 +3809,15 @@
               </a:rPr>
               <a:t> Comprobar si esta hipótesis es cierta y entender qué factores explican las diferencias de precio entre barrios, analizando:</a:t>
             </a:r>
+          </a:p>
+          <a:p>
+            <a:pPr algn="just"/>
             <a:endParaRPr lang="es-ES" dirty="0"/>
           </a:p>
           <a:p>
-            <a:pPr algn="just">
-              <a:buFont typeface="Arial" panose="020B0604020202020204" pitchFamily="34" charset="0"/>
-              <a:buChar char="•"/>
+            <a:pPr marL="742950" lvl="1" indent="-285750" algn="just">
+              <a:buFont typeface="Wingdings" panose="05000000000000000000" pitchFamily="2" charset="2"/>
+              <a:buChar char="Ø"/>
             </a:pPr>
             <a:r>
               <a:rPr lang="es-ES" dirty="0">
@@ -3837,9 +3828,9 @@
             <a:endParaRPr lang="es-ES" dirty="0"/>
           </a:p>
           <a:p>
-            <a:pPr algn="just">
-              <a:buFont typeface="Arial" panose="020B0604020202020204" pitchFamily="34" charset="0"/>
-              <a:buChar char="•"/>
+            <a:pPr marL="742950" lvl="1" indent="-285750" algn="just">
+              <a:buFont typeface="Wingdings" panose="05000000000000000000" pitchFamily="2" charset="2"/>
+              <a:buChar char="Ø"/>
             </a:pPr>
             <a:r>
               <a:rPr lang="es-ES" dirty="0">
@@ -3850,9 +3841,9 @@
             <a:endParaRPr lang="es-ES" dirty="0"/>
           </a:p>
           <a:p>
-            <a:pPr algn="just">
-              <a:buFont typeface="Arial" panose="020B0604020202020204" pitchFamily="34" charset="0"/>
-              <a:buChar char="•"/>
+            <a:pPr marL="742950" lvl="1" indent="-285750" algn="just">
+              <a:buFont typeface="Wingdings" panose="05000000000000000000" pitchFamily="2" charset="2"/>
+              <a:buChar char="Ø"/>
             </a:pPr>
             <a:r>
               <a:rPr lang="es-ES" dirty="0">
@@ -3863,9 +3854,9 @@
             <a:endParaRPr lang="es-ES" dirty="0"/>
           </a:p>
           <a:p>
-            <a:pPr algn="just">
-              <a:buFont typeface="Arial" panose="020B0604020202020204" pitchFamily="34" charset="0"/>
-              <a:buChar char="•"/>
+            <a:pPr marL="742950" lvl="1" indent="-285750" algn="just">
+              <a:buFont typeface="Wingdings" panose="05000000000000000000" pitchFamily="2" charset="2"/>
+              <a:buChar char="Ø"/>
             </a:pPr>
             <a:r>
               <a:rPr lang="es-ES" dirty="0">
@@ -3907,12 +3898,78 @@
           <a:chExt cx="0" cy="0"/>
         </a:xfrm>
       </p:grpSpPr>
+      <p:sp>
+        <p:nvSpPr>
+          <p:cNvPr id="6" name="CuadroTexto 5">
+            <a:extLst>
+              <a:ext uri="{FF2B5EF4-FFF2-40B4-BE49-F238E27FC236}">
+                <a16:creationId xmlns:a16="http://schemas.microsoft.com/office/drawing/2014/main" id="{6C20A48C-ADFA-EF12-DD97-46A7A3157649}"/>
+              </a:ext>
+            </a:extLst>
+          </p:cNvPr>
+          <p:cNvSpPr txBox="1"/>
+          <p:nvPr/>
+        </p:nvSpPr>
+        <p:spPr>
+          <a:xfrm>
+            <a:off x="234884" y="268566"/>
+            <a:ext cx="11485776" cy="1969770"/>
+          </a:xfrm>
+          <a:prstGeom prst="rect">
+            <a:avLst/>
+          </a:prstGeom>
+          <a:noFill/>
+        </p:spPr>
+        <p:txBody>
+          <a:bodyPr wrap="square">
+            <a:spAutoFit/>
+          </a:bodyPr>
+          <a:lstStyle/>
+          <a:p>
+            <a:pPr algn="ctr">
+              <a:buNone/>
+            </a:pPr>
+            <a:r>
+              <a:rPr lang="es-ES" sz="3200" b="1" dirty="0"/>
+              <a:t>ANÁLISIS</a:t>
+            </a:r>
+          </a:p>
+          <a:p>
+            <a:pPr algn="just">
+              <a:buNone/>
+            </a:pPr>
+            <a:endParaRPr lang="es-ES" b="1" dirty="0"/>
+          </a:p>
+          <a:p>
+            <a:pPr algn="just"/>
+            <a:r>
+              <a:rPr lang="es-ES" dirty="0"/>
+              <a:t>Hicimos una primera comparación de los precios por barrios y vimos que había alojamientos con precios muy altos que podían distorsionar el precio medio. Para evitar esa distorsión, en lugar de fijarnos en la media utilizamos la </a:t>
+            </a:r>
+            <a:r>
+              <a:rPr lang="es-ES" b="1" dirty="0"/>
+              <a:t>mediana</a:t>
+            </a:r>
+            <a:r>
+              <a:rPr lang="es-ES" dirty="0"/>
+              <a:t>, que refleja mucho mejor el “precio típico” de cada barrio.</a:t>
+            </a:r>
+          </a:p>
+          <a:p>
+            <a:pPr algn="just"/>
+            <a:r>
+              <a:rPr lang="es-ES" dirty="0"/>
+              <a:t>Esto nos permitió ver con claridad qué zonas son realmente más caras sin que los precios extremos afecten al resultado.</a:t>
+            </a:r>
+          </a:p>
+        </p:txBody>
+      </p:sp>
       <p:pic>
         <p:nvPicPr>
-          <p:cNvPr id="5" name="Imagen 4">
-            <a:extLst>
-              <a:ext uri="{FF2B5EF4-FFF2-40B4-BE49-F238E27FC236}">
-                <a16:creationId xmlns:a16="http://schemas.microsoft.com/office/drawing/2014/main" id="{85717D57-470E-016A-D561-32E2F33F0D02}"/>
+          <p:cNvPr id="8" name="Imagen 7">
+            <a:extLst>
+              <a:ext uri="{FF2B5EF4-FFF2-40B4-BE49-F238E27FC236}">
+                <a16:creationId xmlns:a16="http://schemas.microsoft.com/office/drawing/2014/main" id="{2D8EC8FB-535E-1985-DACB-9C1EE1A2292A}"/>
               </a:ext>
             </a:extLst>
           </p:cNvPr>
@@ -3929,82 +3986,20 @@
         </p:blipFill>
         <p:spPr>
           <a:xfrm>
-            <a:off x="399024" y="304269"/>
-            <a:ext cx="6551523" cy="3202501"/>
+            <a:off x="339411" y="2479250"/>
+            <a:ext cx="5756589" cy="3393907"/>
           </a:xfrm>
           <a:prstGeom prst="rect">
             <a:avLst/>
           </a:prstGeom>
         </p:spPr>
       </p:pic>
-      <p:sp>
-        <p:nvSpPr>
-          <p:cNvPr id="6" name="CuadroTexto 5">
-            <a:extLst>
-              <a:ext uri="{FF2B5EF4-FFF2-40B4-BE49-F238E27FC236}">
-                <a16:creationId xmlns:a16="http://schemas.microsoft.com/office/drawing/2014/main" id="{FE9F1DA4-0DCD-8C17-4104-30F5C99F2C46}"/>
-              </a:ext>
-            </a:extLst>
-          </p:cNvPr>
-          <p:cNvSpPr txBox="1"/>
-          <p:nvPr/>
-        </p:nvSpPr>
-        <p:spPr>
-          <a:xfrm>
-            <a:off x="7588577" y="1203632"/>
-            <a:ext cx="3648174" cy="3416320"/>
-          </a:xfrm>
-          <a:prstGeom prst="rect">
-            <a:avLst/>
-          </a:prstGeom>
-          <a:noFill/>
-        </p:spPr>
-        <p:txBody>
-          <a:bodyPr wrap="square">
-            <a:spAutoFit/>
-          </a:bodyPr>
-          <a:lstStyle/>
-          <a:p>
-            <a:pPr algn="just">
-              <a:buNone/>
-            </a:pPr>
-            <a:r>
-              <a:rPr lang="es-ES" dirty="0"/>
-              <a:t>Los gráficos muestran que, aunque el </a:t>
-            </a:r>
-            <a:r>
-              <a:rPr lang="es-ES" b="1" dirty="0"/>
-              <a:t>Centro</a:t>
-            </a:r>
-            <a:r>
-              <a:rPr lang="es-ES" dirty="0"/>
-              <a:t> no es el barrio con el precio medio más alto, sí es el que concentra </a:t>
-            </a:r>
-            <a:r>
-              <a:rPr lang="es-ES" b="1" dirty="0"/>
-              <a:t>mayor número de alojamientos</a:t>
-            </a:r>
-            <a:r>
-              <a:rPr lang="es-ES" dirty="0"/>
-              <a:t>. Para evitar sesgos derivados de barrios con muy poca oferta, establecemos un </a:t>
-            </a:r>
-            <a:r>
-              <a:rPr lang="es-ES" b="1" dirty="0"/>
-              <a:t>umbral mínimo de 200 alojamientos</a:t>
-            </a:r>
-            <a:r>
-              <a:rPr lang="es-ES" dirty="0"/>
-              <a:t> (línea roja). Solo los barrios que superan este volumen se incluirán en el análisis comparativo para asegurar resultados más representativos.</a:t>
-            </a:r>
-          </a:p>
-        </p:txBody>
-      </p:sp>
       <p:pic>
         <p:nvPicPr>
           <p:cNvPr id="10" name="Imagen 9">
             <a:extLst>
               <a:ext uri="{FF2B5EF4-FFF2-40B4-BE49-F238E27FC236}">
-                <a16:creationId xmlns:a16="http://schemas.microsoft.com/office/drawing/2014/main" id="{21FED89A-755D-86F6-4DE6-1075013195E1}"/>
+                <a16:creationId xmlns:a16="http://schemas.microsoft.com/office/drawing/2014/main" id="{3CA72B17-1E42-8ADA-BCC9-54FAF58B3F7E}"/>
               </a:ext>
             </a:extLst>
           </p:cNvPr>
@@ -4021,18 +4016,194 @@
         </p:blipFill>
         <p:spPr>
           <a:xfrm>
-            <a:off x="46629" y="3388936"/>
-            <a:ext cx="6810262" cy="3324185"/>
+            <a:off x="6350414" y="2984113"/>
+            <a:ext cx="5257993" cy="2823056"/>
           </a:xfrm>
           <a:prstGeom prst="rect">
             <a:avLst/>
           </a:prstGeom>
         </p:spPr>
       </p:pic>
+      <p:cxnSp>
+        <p:nvCxnSpPr>
+          <p:cNvPr id="12" name="Conector recto de flecha 11">
+            <a:extLst>
+              <a:ext uri="{FF2B5EF4-FFF2-40B4-BE49-F238E27FC236}">
+                <a16:creationId xmlns:a16="http://schemas.microsoft.com/office/drawing/2014/main" id="{B704406E-AAB4-ED4C-D9B1-988BB76C0615}"/>
+              </a:ext>
+            </a:extLst>
+          </p:cNvPr>
+          <p:cNvCxnSpPr>
+            <a:cxnSpLocks/>
+          </p:cNvCxnSpPr>
+          <p:nvPr/>
+        </p:nvCxnSpPr>
+        <p:spPr>
+          <a:xfrm flipV="1">
+            <a:off x="234884" y="4333901"/>
+            <a:ext cx="764357" cy="1241782"/>
+          </a:xfrm>
+          <a:prstGeom prst="straightConnector1">
+            <a:avLst/>
+          </a:prstGeom>
+          <a:ln w="38100">
+            <a:solidFill>
+              <a:srgbClr val="FF0000"/>
+            </a:solidFill>
+            <a:tailEnd type="triangle"/>
+          </a:ln>
+        </p:spPr>
+        <p:style>
+          <a:lnRef idx="1">
+            <a:schemeClr val="accent1"/>
+          </a:lnRef>
+          <a:fillRef idx="0">
+            <a:schemeClr val="accent1"/>
+          </a:fillRef>
+          <a:effectRef idx="0">
+            <a:schemeClr val="accent1"/>
+          </a:effectRef>
+          <a:fontRef idx="minor">
+            <a:schemeClr val="tx1"/>
+          </a:fontRef>
+        </p:style>
+      </p:cxnSp>
+      <p:sp>
+        <p:nvSpPr>
+          <p:cNvPr id="14" name="CuadroTexto 13">
+            <a:extLst>
+              <a:ext uri="{FF2B5EF4-FFF2-40B4-BE49-F238E27FC236}">
+                <a16:creationId xmlns:a16="http://schemas.microsoft.com/office/drawing/2014/main" id="{93ADC4DB-A5CC-DE8D-E7BB-64116070727B}"/>
+              </a:ext>
+            </a:extLst>
+          </p:cNvPr>
+          <p:cNvSpPr txBox="1"/>
+          <p:nvPr/>
+        </p:nvSpPr>
+        <p:spPr>
+          <a:xfrm>
+            <a:off x="84997" y="5667859"/>
+            <a:ext cx="1536569" cy="646331"/>
+          </a:xfrm>
+          <a:prstGeom prst="rect">
+            <a:avLst/>
+          </a:prstGeom>
+          <a:noFill/>
+        </p:spPr>
+        <p:txBody>
+          <a:bodyPr wrap="square">
+            <a:spAutoFit/>
+          </a:bodyPr>
+          <a:lstStyle/>
+          <a:p>
+            <a:pPr algn="just"/>
+            <a:r>
+              <a:rPr lang="es-ES" b="1" dirty="0">
+                <a:solidFill>
+                  <a:srgbClr val="FF0000"/>
+                </a:solidFill>
+              </a:rPr>
+              <a:t>Precios muy elevados</a:t>
+            </a:r>
+          </a:p>
+        </p:txBody>
+      </p:sp>
+      <p:sp>
+        <p:nvSpPr>
+          <p:cNvPr id="17" name="Rectángulo 16">
+            <a:extLst>
+              <a:ext uri="{FF2B5EF4-FFF2-40B4-BE49-F238E27FC236}">
+                <a16:creationId xmlns:a16="http://schemas.microsoft.com/office/drawing/2014/main" id="{B63658AE-FFF3-F615-A705-37405F6A53C2}"/>
+              </a:ext>
+            </a:extLst>
+          </p:cNvPr>
+          <p:cNvSpPr/>
+          <p:nvPr/>
+        </p:nvSpPr>
+        <p:spPr>
+          <a:xfrm>
+            <a:off x="9700181" y="3289955"/>
+            <a:ext cx="433633" cy="2285728"/>
+          </a:xfrm>
+          <a:prstGeom prst="rect">
+            <a:avLst/>
+          </a:prstGeom>
+          <a:noFill/>
+          <a:ln w="38100">
+            <a:solidFill>
+              <a:srgbClr val="FF0000"/>
+            </a:solidFill>
+          </a:ln>
+        </p:spPr>
+        <p:style>
+          <a:lnRef idx="2">
+            <a:schemeClr val="accent1">
+              <a:shade val="15000"/>
+            </a:schemeClr>
+          </a:lnRef>
+          <a:fillRef idx="1">
+            <a:schemeClr val="accent1"/>
+          </a:fillRef>
+          <a:effectRef idx="0">
+            <a:schemeClr val="accent1"/>
+          </a:effectRef>
+          <a:fontRef idx="minor">
+            <a:schemeClr val="lt1"/>
+          </a:fontRef>
+        </p:style>
+        <p:txBody>
+          <a:bodyPr rtlCol="0" anchor="ctr"/>
+          <a:lstStyle/>
+          <a:p>
+            <a:pPr algn="ctr"/>
+            <a:endParaRPr lang="es-ES"/>
+          </a:p>
+        </p:txBody>
+      </p:sp>
+      <p:sp>
+        <p:nvSpPr>
+          <p:cNvPr id="18" name="CuadroTexto 17">
+            <a:extLst>
+              <a:ext uri="{FF2B5EF4-FFF2-40B4-BE49-F238E27FC236}">
+                <a16:creationId xmlns:a16="http://schemas.microsoft.com/office/drawing/2014/main" id="{07FFF9F4-EFFB-3A16-4D7C-954095EEB121}"/>
+              </a:ext>
+            </a:extLst>
+          </p:cNvPr>
+          <p:cNvSpPr txBox="1"/>
+          <p:nvPr/>
+        </p:nvSpPr>
+        <p:spPr>
+          <a:xfrm>
+            <a:off x="8001407" y="5873157"/>
+            <a:ext cx="3662692" cy="646331"/>
+          </a:xfrm>
+          <a:prstGeom prst="rect">
+            <a:avLst/>
+          </a:prstGeom>
+          <a:noFill/>
+        </p:spPr>
+        <p:txBody>
+          <a:bodyPr wrap="square">
+            <a:spAutoFit/>
+          </a:bodyPr>
+          <a:lstStyle/>
+          <a:p>
+            <a:pPr algn="just"/>
+            <a:r>
+              <a:rPr lang="es-ES" b="1" dirty="0">
+                <a:solidFill>
+                  <a:srgbClr val="FF0000"/>
+                </a:solidFill>
+              </a:rPr>
+              <a:t>NO SE CONFIRMA LA HIPÓTEIS, el CENTRO se sitúa en la 4 posición.</a:t>
+            </a:r>
+          </a:p>
+        </p:txBody>
+      </p:sp>
     </p:spTree>
     <p:extLst>
       <p:ext uri="{BB962C8B-B14F-4D97-AF65-F5344CB8AC3E}">
-        <p14:creationId xmlns:p14="http://schemas.microsoft.com/office/powerpoint/2010/main" val="1216299827"/>
+        <p14:creationId xmlns:p14="http://schemas.microsoft.com/office/powerpoint/2010/main" val="1931060060"/>
       </p:ext>
     </p:extLst>
   </p:cSld>
@@ -4059,12 +4230,56 @@
           <a:chExt cx="0" cy="0"/>
         </a:xfrm>
       </p:grpSpPr>
+      <p:sp>
+        <p:nvSpPr>
+          <p:cNvPr id="6" name="Marcador de contenido 2">
+            <a:extLst>
+              <a:ext uri="{FF2B5EF4-FFF2-40B4-BE49-F238E27FC236}">
+                <a16:creationId xmlns:a16="http://schemas.microsoft.com/office/drawing/2014/main" id="{84656C70-C30E-D9F3-6992-A54F019588FB}"/>
+              </a:ext>
+            </a:extLst>
+          </p:cNvPr>
+          <p:cNvSpPr>
+            <a:spLocks noGrp="1"/>
+          </p:cNvSpPr>
+          <p:nvPr>
+            <p:ph idx="1"/>
+          </p:nvPr>
+        </p:nvSpPr>
+        <p:spPr>
+          <a:xfrm>
+            <a:off x="338578" y="553006"/>
+            <a:ext cx="10785049" cy="653625"/>
+          </a:xfrm>
+        </p:spPr>
+        <p:txBody>
+          <a:bodyPr>
+            <a:normAutofit/>
+          </a:bodyPr>
+          <a:lstStyle/>
+          <a:p>
+            <a:pPr marL="0" indent="0" algn="ctr">
+              <a:buNone/>
+            </a:pPr>
+            <a:r>
+              <a:rPr lang="es-ES" sz="4000" b="1" dirty="0"/>
+              <a:t>RESULTADOS OBTENIDOS</a:t>
+            </a:r>
+          </a:p>
+          <a:p>
+            <a:pPr marL="0" indent="0" algn="ctr">
+              <a:buNone/>
+            </a:pPr>
+            <a:endParaRPr lang="es-ES" sz="4000" b="1" dirty="0"/>
+          </a:p>
+        </p:txBody>
+      </p:sp>
       <p:pic>
         <p:nvPicPr>
-          <p:cNvPr id="5" name="Imagen 4">
-            <a:extLst>
-              <a:ext uri="{FF2B5EF4-FFF2-40B4-BE49-F238E27FC236}">
-                <a16:creationId xmlns:a16="http://schemas.microsoft.com/office/drawing/2014/main" id="{53B9CC8B-EB19-DECB-5191-381FE3723C52}"/>
+          <p:cNvPr id="3" name="Imagen 2">
+            <a:extLst>
+              <a:ext uri="{FF2B5EF4-FFF2-40B4-BE49-F238E27FC236}">
+                <a16:creationId xmlns:a16="http://schemas.microsoft.com/office/drawing/2014/main" id="{0E5F03C7-C224-EF94-8634-6F075058BA5F}"/>
               </a:ext>
             </a:extLst>
           </p:cNvPr>
@@ -4081,20 +4296,64 @@
         </p:blipFill>
         <p:spPr>
           <a:xfrm>
-            <a:off x="162364" y="1259262"/>
-            <a:ext cx="6483533" cy="4651393"/>
+            <a:off x="523721" y="1366885"/>
+            <a:ext cx="5406247" cy="3327663"/>
           </a:xfrm>
           <a:prstGeom prst="rect">
             <a:avLst/>
           </a:prstGeom>
         </p:spPr>
       </p:pic>
-      <p:sp>
-        <p:nvSpPr>
-          <p:cNvPr id="6" name="CuadroTexto 5">
-            <a:extLst>
-              <a:ext uri="{FF2B5EF4-FFF2-40B4-BE49-F238E27FC236}">
-                <a16:creationId xmlns:a16="http://schemas.microsoft.com/office/drawing/2014/main" id="{68FCA029-6C94-0B7D-EFB8-520F368F200D}"/>
+      <p:cxnSp>
+        <p:nvCxnSpPr>
+          <p:cNvPr id="7" name="Conector recto de flecha 6">
+            <a:extLst>
+              <a:ext uri="{FF2B5EF4-FFF2-40B4-BE49-F238E27FC236}">
+                <a16:creationId xmlns:a16="http://schemas.microsoft.com/office/drawing/2014/main" id="{5701FA0E-6E7C-29EB-FE48-5DED8A478442}"/>
+              </a:ext>
+            </a:extLst>
+          </p:cNvPr>
+          <p:cNvCxnSpPr>
+            <a:cxnSpLocks/>
+          </p:cNvCxnSpPr>
+          <p:nvPr/>
+        </p:nvCxnSpPr>
+        <p:spPr>
+          <a:xfrm flipV="1">
+            <a:off x="1027522" y="4694548"/>
+            <a:ext cx="593888" cy="353505"/>
+          </a:xfrm>
+          <a:prstGeom prst="straightConnector1">
+            <a:avLst/>
+          </a:prstGeom>
+          <a:ln w="38100">
+            <a:solidFill>
+              <a:srgbClr val="FF0000"/>
+            </a:solidFill>
+            <a:tailEnd type="triangle"/>
+          </a:ln>
+        </p:spPr>
+        <p:style>
+          <a:lnRef idx="1">
+            <a:schemeClr val="accent1"/>
+          </a:lnRef>
+          <a:fillRef idx="0">
+            <a:schemeClr val="accent1"/>
+          </a:fillRef>
+          <a:effectRef idx="0">
+            <a:schemeClr val="accent1"/>
+          </a:effectRef>
+          <a:fontRef idx="minor">
+            <a:schemeClr val="tx1"/>
+          </a:fontRef>
+        </p:style>
+      </p:cxnSp>
+      <p:sp>
+        <p:nvSpPr>
+          <p:cNvPr id="9" name="CuadroTexto 8">
+            <a:extLst>
+              <a:ext uri="{FF2B5EF4-FFF2-40B4-BE49-F238E27FC236}">
+                <a16:creationId xmlns:a16="http://schemas.microsoft.com/office/drawing/2014/main" id="{46BEB2B4-BDD1-48AC-2F2A-7EB7E83E29E2}"/>
               </a:ext>
             </a:extLst>
           </p:cNvPr>
@@ -4103,8 +4362,8 @@
         </p:nvSpPr>
         <p:spPr>
           <a:xfrm>
-            <a:off x="6909846" y="1259262"/>
-            <a:ext cx="4440025" cy="3693319"/>
+            <a:off x="179264" y="5104665"/>
+            <a:ext cx="5269428" cy="1477328"/>
           </a:xfrm>
           <a:prstGeom prst="rect">
             <a:avLst/>
@@ -4117,76 +4376,172 @@
           </a:bodyPr>
           <a:lstStyle/>
           <a:p>
+            <a:r>
+              <a:rPr lang="es-ES" b="1" dirty="0">
+                <a:solidFill>
+                  <a:srgbClr val="FF0000"/>
+                </a:solidFill>
+              </a:rPr>
+              <a:t>Los pisos completos son los más caros</a:t>
+            </a:r>
+          </a:p>
+          <a:p>
+            <a:r>
+              <a:rPr lang="es-ES" b="1" dirty="0">
+                <a:solidFill>
+                  <a:srgbClr val="FF0000"/>
+                </a:solidFill>
+              </a:rPr>
+              <a:t>Los alojamientos que se alquilan enteros son, con diferencia, los que tienen los precios más altos en todos los barrios. Las habitaciones privadas, compartidas o de hotel son mucho más económicas.</a:t>
+            </a:r>
+          </a:p>
+        </p:txBody>
+      </p:sp>
+      <p:pic>
+        <p:nvPicPr>
+          <p:cNvPr id="15" name="Imagen 14">
+            <a:extLst>
+              <a:ext uri="{FF2B5EF4-FFF2-40B4-BE49-F238E27FC236}">
+                <a16:creationId xmlns:a16="http://schemas.microsoft.com/office/drawing/2014/main" id="{8027EBB5-E652-38D8-CCC4-7BE640F051CF}"/>
+              </a:ext>
+            </a:extLst>
+          </p:cNvPr>
+          <p:cNvPicPr>
+            <a:picLocks noChangeAspect="1"/>
+          </p:cNvPicPr>
+          <p:nvPr/>
+        </p:nvPicPr>
+        <p:blipFill>
+          <a:blip r:embed="rId3"/>
+          <a:stretch>
+            <a:fillRect/>
+          </a:stretch>
+        </p:blipFill>
+        <p:spPr>
+          <a:xfrm>
+            <a:off x="6262034" y="1297950"/>
+            <a:ext cx="5539086" cy="3750103"/>
+          </a:xfrm>
+          <a:prstGeom prst="rect">
+            <a:avLst/>
+          </a:prstGeom>
+        </p:spPr>
+      </p:pic>
+      <p:cxnSp>
+        <p:nvCxnSpPr>
+          <p:cNvPr id="16" name="Conector recto de flecha 15">
+            <a:extLst>
+              <a:ext uri="{FF2B5EF4-FFF2-40B4-BE49-F238E27FC236}">
+                <a16:creationId xmlns:a16="http://schemas.microsoft.com/office/drawing/2014/main" id="{4CF83787-8526-7DFA-8076-64CDB46779D7}"/>
+              </a:ext>
+            </a:extLst>
+          </p:cNvPr>
+          <p:cNvCxnSpPr>
+            <a:cxnSpLocks/>
+          </p:cNvCxnSpPr>
+          <p:nvPr/>
+        </p:nvCxnSpPr>
+        <p:spPr>
+          <a:xfrm flipV="1">
+            <a:off x="8418136" y="2422689"/>
+            <a:ext cx="2799761" cy="1923068"/>
+          </a:xfrm>
+          <a:prstGeom prst="straightConnector1">
+            <a:avLst/>
+          </a:prstGeom>
+          <a:ln w="38100">
+            <a:solidFill>
+              <a:srgbClr val="FF0000"/>
+            </a:solidFill>
+            <a:tailEnd type="triangle"/>
+          </a:ln>
+        </p:spPr>
+        <p:style>
+          <a:lnRef idx="1">
+            <a:schemeClr val="accent1"/>
+          </a:lnRef>
+          <a:fillRef idx="0">
+            <a:schemeClr val="accent1"/>
+          </a:fillRef>
+          <a:effectRef idx="0">
+            <a:schemeClr val="accent1"/>
+          </a:effectRef>
+          <a:fontRef idx="minor">
+            <a:schemeClr val="tx1"/>
+          </a:fontRef>
+        </p:style>
+      </p:cxnSp>
+      <p:sp>
+        <p:nvSpPr>
+          <p:cNvPr id="19" name="CuadroTexto 18">
+            <a:extLst>
+              <a:ext uri="{FF2B5EF4-FFF2-40B4-BE49-F238E27FC236}">
+                <a16:creationId xmlns:a16="http://schemas.microsoft.com/office/drawing/2014/main" id="{FA43F061-F3C2-D923-C17E-79F802583AA2}"/>
+              </a:ext>
+            </a:extLst>
+          </p:cNvPr>
+          <p:cNvSpPr txBox="1"/>
+          <p:nvPr/>
+        </p:nvSpPr>
+        <p:spPr>
+          <a:xfrm>
+            <a:off x="7145671" y="5052817"/>
+            <a:ext cx="4477578" cy="1754326"/>
+          </a:xfrm>
+          <a:prstGeom prst="rect">
+            <a:avLst/>
+          </a:prstGeom>
+          <a:noFill/>
+        </p:spPr>
+        <p:txBody>
+          <a:bodyPr wrap="square">
+            <a:spAutoFit/>
+          </a:bodyPr>
+          <a:lstStyle/>
+          <a:p>
+            <a:r>
+              <a:rPr lang="es-ES" b="1" dirty="0">
+                <a:solidFill>
+                  <a:srgbClr val="FF0000"/>
+                </a:solidFill>
+              </a:rPr>
+              <a:t>El tamaño importa</a:t>
+            </a:r>
+          </a:p>
+          <a:p>
+            <a:r>
+              <a:rPr lang="es-ES" b="1" dirty="0">
+                <a:solidFill>
+                  <a:srgbClr val="FF0000"/>
+                </a:solidFill>
+              </a:rPr>
+              <a:t>Cuantas más personas caben en un alojamiento, más sube el precio. </a:t>
+            </a:r>
+          </a:p>
+          <a:p>
+            <a:r>
+              <a:rPr lang="es-ES" b="1" dirty="0">
+                <a:solidFill>
+                  <a:srgbClr val="FF0000"/>
+                </a:solidFill>
+              </a:rPr>
+              <a:t>Los alojamientos grandes son siempre más caros que los pequeños.</a:t>
+            </a:r>
+          </a:p>
+          <a:p>
             <a:pPr algn="just"/>
-            <a:r>
-              <a:rPr lang="es-ES" dirty="0"/>
-              <a:t>La matriz de correlaciones muestra la relación entre el precio y distintas variables del alojamiento. Se observa que la </a:t>
-            </a:r>
-            <a:r>
-              <a:rPr lang="es-ES" b="1" dirty="0"/>
-              <a:t>capacidad del alojamiento (</a:t>
-            </a:r>
-            <a:r>
-              <a:rPr lang="es-ES" b="1" dirty="0" err="1"/>
-              <a:t>accommodates</a:t>
-            </a:r>
-            <a:r>
-              <a:rPr lang="es-ES" b="1" dirty="0"/>
-              <a:t>)</a:t>
-            </a:r>
-            <a:r>
-              <a:rPr lang="es-ES" dirty="0"/>
-              <a:t> es el factor que presenta la correlación más alta con el precio (</a:t>
-            </a:r>
-            <a:r>
-              <a:rPr lang="es-ES" b="1" dirty="0"/>
-              <a:t>0.59</a:t>
-            </a:r>
-            <a:r>
-              <a:rPr lang="es-ES" dirty="0"/>
-              <a:t>), lo que indica que, a mayor número de huéspedes admitidos, mayor tiende a ser el precio. </a:t>
-            </a:r>
-          </a:p>
-          <a:p>
-            <a:pPr algn="just"/>
-            <a:r>
-              <a:rPr lang="es-ES" dirty="0"/>
-              <a:t>El resto de variables:</a:t>
-            </a:r>
-          </a:p>
-          <a:p>
-            <a:pPr marL="285750" indent="-285750" algn="just">
-              <a:buFontTx/>
-              <a:buChar char="-"/>
-            </a:pPr>
-            <a:r>
-              <a:rPr lang="es-ES" dirty="0"/>
-              <a:t>valoración del alojamiento</a:t>
-            </a:r>
-          </a:p>
-          <a:p>
-            <a:pPr marL="285750" indent="-285750" algn="just">
-              <a:buFontTx/>
-              <a:buChar char="-"/>
-            </a:pPr>
-            <a:r>
-              <a:rPr lang="es-ES" dirty="0"/>
-              <a:t>disponibilidad anual</a:t>
-            </a:r>
-          </a:p>
-          <a:p>
-            <a:pPr algn="just"/>
-            <a:r>
-              <a:rPr lang="es-ES" dirty="0"/>
-              <a:t>presentan correlaciones muy bajas, por lo que su influencia en el precio es mínima.</a:t>
-            </a:r>
+            <a:endParaRPr lang="es-ES" b="1" dirty="0">
+              <a:solidFill>
+                <a:srgbClr val="FF0000"/>
+              </a:solidFill>
+            </a:endParaRPr>
           </a:p>
         </p:txBody>
       </p:sp>
     </p:spTree>
     <p:extLst>
       <p:ext uri="{BB962C8B-B14F-4D97-AF65-F5344CB8AC3E}">
-        <p14:creationId xmlns:p14="http://schemas.microsoft.com/office/powerpoint/2010/main" val="1565500866"/>
+        <p14:creationId xmlns:p14="http://schemas.microsoft.com/office/powerpoint/2010/main" val="3191711258"/>
       </p:ext>
     </p:extLst>
   </p:cSld>
@@ -4201,171 +4556,10 @@
   <p:cSld>
     <p:spTree>
       <p:nvGrpSpPr>
-        <p:cNvPr id="1" name=""/>
-        <p:cNvGrpSpPr/>
-        <p:nvPr/>
-      </p:nvGrpSpPr>
-      <p:grpSpPr>
-        <a:xfrm>
-          <a:off x="0" y="0"/>
-          <a:ext cx="0" cy="0"/>
-          <a:chOff x="0" y="0"/>
-          <a:chExt cx="0" cy="0"/>
-        </a:xfrm>
-      </p:grpSpPr>
-      <p:sp>
-        <p:nvSpPr>
-          <p:cNvPr id="10" name="CuadroTexto 9">
-            <a:extLst>
-              <a:ext uri="{FF2B5EF4-FFF2-40B4-BE49-F238E27FC236}">
-                <a16:creationId xmlns:a16="http://schemas.microsoft.com/office/drawing/2014/main" id="{22959188-5AAA-1268-4D83-86A2EF5E759B}"/>
-              </a:ext>
-            </a:extLst>
-          </p:cNvPr>
-          <p:cNvSpPr txBox="1"/>
-          <p:nvPr/>
-        </p:nvSpPr>
-        <p:spPr>
-          <a:xfrm>
-            <a:off x="6815577" y="1221555"/>
-            <a:ext cx="4440025" cy="3139321"/>
-          </a:xfrm>
-          <a:prstGeom prst="rect">
-            <a:avLst/>
-          </a:prstGeom>
-          <a:noFill/>
-        </p:spPr>
-        <p:txBody>
-          <a:bodyPr wrap="square">
-            <a:spAutoFit/>
-          </a:bodyPr>
-          <a:lstStyle/>
-          <a:p>
-            <a:pPr algn="just"/>
-            <a:r>
-              <a:rPr lang="es-ES" dirty="0"/>
-              <a:t>Los gráficos muestran que el </a:t>
-            </a:r>
-            <a:r>
-              <a:rPr lang="es-ES" b="1" dirty="0"/>
-              <a:t>precio medio por barrio</a:t>
-            </a:r>
-            <a:r>
-              <a:rPr lang="es-ES" dirty="0"/>
-              <a:t> es más alto en el Este, mientras que el </a:t>
-            </a:r>
-            <a:r>
-              <a:rPr lang="es-ES" b="1" dirty="0"/>
-              <a:t>Centro</a:t>
-            </a:r>
-            <a:r>
-              <a:rPr lang="es-ES" dirty="0"/>
-              <a:t>, aunque no es el más caro, sí concentra la mayor actividad y densidad de alojamientos. </a:t>
-            </a:r>
-          </a:p>
-          <a:p>
-            <a:pPr algn="just"/>
-            <a:endParaRPr lang="es-ES" dirty="0"/>
-          </a:p>
-          <a:p>
-            <a:pPr algn="just"/>
-            <a:r>
-              <a:rPr lang="es-ES" dirty="0"/>
-              <a:t>Al analizar el </a:t>
-            </a:r>
-            <a:r>
-              <a:rPr lang="es-ES" b="1" dirty="0"/>
-              <a:t>precio medio por persona</a:t>
-            </a:r>
-            <a:r>
-              <a:rPr lang="es-ES" dirty="0"/>
-              <a:t>, el Centro supera ligeramente al Este, lo que sugiere que los alojamientos céntricos suelen estar optimizados para grupos más pequeños. </a:t>
-            </a:r>
-          </a:p>
-        </p:txBody>
-      </p:sp>
-      <p:pic>
-        <p:nvPicPr>
-          <p:cNvPr id="3" name="Imagen 2">
-            <a:extLst>
-              <a:ext uri="{FF2B5EF4-FFF2-40B4-BE49-F238E27FC236}">
-                <a16:creationId xmlns:a16="http://schemas.microsoft.com/office/drawing/2014/main" id="{DAE7A1E0-50B3-600D-739C-A6D644FBB5BB}"/>
-              </a:ext>
-            </a:extLst>
-          </p:cNvPr>
-          <p:cNvPicPr>
-            <a:picLocks noChangeAspect="1"/>
-          </p:cNvPicPr>
-          <p:nvPr/>
-        </p:nvPicPr>
-        <p:blipFill>
-          <a:blip r:embed="rId2"/>
-          <a:stretch>
-            <a:fillRect/>
-          </a:stretch>
-        </p:blipFill>
-        <p:spPr>
-          <a:xfrm>
-            <a:off x="322333" y="509128"/>
-            <a:ext cx="5896175" cy="2943340"/>
-          </a:xfrm>
-          <a:prstGeom prst="rect">
-            <a:avLst/>
-          </a:prstGeom>
-        </p:spPr>
-      </p:pic>
-      <p:pic>
-        <p:nvPicPr>
-          <p:cNvPr id="6" name="Imagen 5">
-            <a:extLst>
-              <a:ext uri="{FF2B5EF4-FFF2-40B4-BE49-F238E27FC236}">
-                <a16:creationId xmlns:a16="http://schemas.microsoft.com/office/drawing/2014/main" id="{3AC775A1-289E-0F27-24BE-CE7E24298F7A}"/>
-              </a:ext>
-            </a:extLst>
-          </p:cNvPr>
-          <p:cNvPicPr>
-            <a:picLocks noChangeAspect="1"/>
-          </p:cNvPicPr>
-          <p:nvPr/>
-        </p:nvPicPr>
-        <p:blipFill>
-          <a:blip r:embed="rId3"/>
-          <a:stretch>
-            <a:fillRect/>
-          </a:stretch>
-        </p:blipFill>
-        <p:spPr>
-          <a:xfrm>
-            <a:off x="397748" y="3635012"/>
-            <a:ext cx="5900763" cy="2943340"/>
-          </a:xfrm>
-          <a:prstGeom prst="rect">
-            <a:avLst/>
-          </a:prstGeom>
-        </p:spPr>
-      </p:pic>
-    </p:spTree>
-    <p:extLst>
-      <p:ext uri="{BB962C8B-B14F-4D97-AF65-F5344CB8AC3E}">
-        <p14:creationId xmlns:p14="http://schemas.microsoft.com/office/powerpoint/2010/main" val="2203722881"/>
-      </p:ext>
-    </p:extLst>
-  </p:cSld>
-  <p:clrMapOvr>
-    <a:masterClrMapping/>
-  </p:clrMapOvr>
-</p:sld>
-</file>
-
-<file path=ppt/slides/slide7.xml><?xml version="1.0" encoding="utf-8"?>
-<p:sld xmlns:a="http://schemas.openxmlformats.org/drawingml/2006/main" xmlns:r="http://schemas.openxmlformats.org/officeDocument/2006/relationships" xmlns:p="http://schemas.openxmlformats.org/presentationml/2006/main">
-  <p:cSld>
-    <p:spTree>
-      <p:nvGrpSpPr>
         <p:cNvPr id="1" name="">
           <a:extLst>
             <a:ext uri="{FF2B5EF4-FFF2-40B4-BE49-F238E27FC236}">
-              <a16:creationId xmlns:a16="http://schemas.microsoft.com/office/drawing/2014/main" id="{02D3EAC0-7CA2-5385-FEB8-0CF0E0C5725A}"/>
+              <a16:creationId xmlns:a16="http://schemas.microsoft.com/office/drawing/2014/main" id="{61486A38-A8F2-EA3B-6BDF-837F553C385D}"/>
             </a:ext>
           </a:extLst>
         </p:cNvPr>
@@ -4382,24 +4576,24 @@
       </p:grpSpPr>
       <p:sp>
         <p:nvSpPr>
-          <p:cNvPr id="2" name="Título 1">
-            <a:extLst>
-              <a:ext uri="{FF2B5EF4-FFF2-40B4-BE49-F238E27FC236}">
-                <a16:creationId xmlns:a16="http://schemas.microsoft.com/office/drawing/2014/main" id="{214C863B-8BFC-CE96-7833-252E9FDD45BF}"/>
-              </a:ext>
-            </a:extLst>
-          </p:cNvPr>
-          <p:cNvSpPr>
-            <a:spLocks noGrp="1"/>
-          </p:cNvSpPr>
-          <p:nvPr>
-            <p:ph type="title"/>
+          <p:cNvPr id="6" name="Marcador de contenido 2">
+            <a:extLst>
+              <a:ext uri="{FF2B5EF4-FFF2-40B4-BE49-F238E27FC236}">
+                <a16:creationId xmlns:a16="http://schemas.microsoft.com/office/drawing/2014/main" id="{EBBA7EC8-18DB-813A-667D-BDBCB44FBCED}"/>
+              </a:ext>
+            </a:extLst>
+          </p:cNvPr>
+          <p:cNvSpPr>
+            <a:spLocks noGrp="1"/>
+          </p:cNvSpPr>
+          <p:nvPr>
+            <p:ph idx="1"/>
           </p:nvPr>
         </p:nvSpPr>
         <p:spPr>
           <a:xfrm>
-            <a:off x="508262" y="1385741"/>
-            <a:ext cx="10515600" cy="2275150"/>
+            <a:off x="338578" y="553006"/>
+            <a:ext cx="10785049" cy="653625"/>
           </a:xfrm>
         </p:spPr>
         <p:txBody>
@@ -4408,22 +4602,111 @@
           </a:bodyPr>
           <a:lstStyle/>
           <a:p>
-            <a:br>
-              <a:rPr lang="es-ES" sz="3600" dirty="0"/>
-            </a:br>
-            <a:br>
-              <a:rPr lang="es-ES" dirty="0"/>
-            </a:br>
-            <a:endParaRPr lang="es-ES" dirty="0"/>
+            <a:pPr marL="0" indent="0" algn="ctr">
+              <a:buNone/>
+            </a:pPr>
+            <a:r>
+              <a:rPr lang="es-ES" sz="4000" b="1" dirty="0"/>
+              <a:t>RESULTADOS OBTENIDOS</a:t>
+            </a:r>
+          </a:p>
+          <a:p>
+            <a:pPr marL="0" indent="0" algn="ctr">
+              <a:buNone/>
+            </a:pPr>
+            <a:endParaRPr lang="es-ES" sz="4000" b="1" dirty="0"/>
+          </a:p>
+        </p:txBody>
+      </p:sp>
+      <p:cxnSp>
+        <p:nvCxnSpPr>
+          <p:cNvPr id="7" name="Conector recto de flecha 6">
+            <a:extLst>
+              <a:ext uri="{FF2B5EF4-FFF2-40B4-BE49-F238E27FC236}">
+                <a16:creationId xmlns:a16="http://schemas.microsoft.com/office/drawing/2014/main" id="{B7269D03-01DC-A976-A301-A52DA2FCBCB3}"/>
+              </a:ext>
+            </a:extLst>
+          </p:cNvPr>
+          <p:cNvCxnSpPr>
+            <a:cxnSpLocks/>
+          </p:cNvCxnSpPr>
+          <p:nvPr/>
+        </p:nvCxnSpPr>
+        <p:spPr>
+          <a:xfrm flipV="1">
+            <a:off x="1300899" y="4501122"/>
+            <a:ext cx="207390" cy="542218"/>
+          </a:xfrm>
+          <a:prstGeom prst="straightConnector1">
+            <a:avLst/>
+          </a:prstGeom>
+          <a:ln w="38100">
+            <a:solidFill>
+              <a:srgbClr val="FF0000"/>
+            </a:solidFill>
+            <a:tailEnd type="triangle"/>
+          </a:ln>
+        </p:spPr>
+        <p:style>
+          <a:lnRef idx="1">
+            <a:schemeClr val="accent1"/>
+          </a:lnRef>
+          <a:fillRef idx="0">
+            <a:schemeClr val="accent1"/>
+          </a:fillRef>
+          <a:effectRef idx="0">
+            <a:schemeClr val="accent1"/>
+          </a:effectRef>
+          <a:fontRef idx="minor">
+            <a:schemeClr val="tx1"/>
+          </a:fontRef>
+        </p:style>
+      </p:cxnSp>
+      <p:sp>
+        <p:nvSpPr>
+          <p:cNvPr id="9" name="CuadroTexto 8">
+            <a:extLst>
+              <a:ext uri="{FF2B5EF4-FFF2-40B4-BE49-F238E27FC236}">
+                <a16:creationId xmlns:a16="http://schemas.microsoft.com/office/drawing/2014/main" id="{EA344279-F9B0-4B70-96B4-CED96AEB9E59}"/>
+              </a:ext>
+            </a:extLst>
+          </p:cNvPr>
+          <p:cNvSpPr txBox="1"/>
+          <p:nvPr/>
+        </p:nvSpPr>
+        <p:spPr>
+          <a:xfrm>
+            <a:off x="179264" y="5151473"/>
+            <a:ext cx="5269428" cy="1477328"/>
+          </a:xfrm>
+          <a:prstGeom prst="rect">
+            <a:avLst/>
+          </a:prstGeom>
+          <a:noFill/>
+        </p:spPr>
+        <p:txBody>
+          <a:bodyPr wrap="square">
+            <a:spAutoFit/>
+          </a:bodyPr>
+          <a:lstStyle/>
+          <a:p>
+            <a:r>
+              <a:rPr lang="es-ES" b="1" dirty="0">
+                <a:solidFill>
+                  <a:srgbClr val="FF0000"/>
+                </a:solidFill>
+              </a:rPr>
+              <a:t>Los alojamientos que se reservan para pocos días son los que tienen el precio por noche más alto. Esto es normal porque las estancias cortas implican más trabajo para el anfitrión (limpiezas, cambios, gestión), y por eso el precio sube.</a:t>
+            </a:r>
           </a:p>
         </p:txBody>
       </p:sp>
       <p:pic>
         <p:nvPicPr>
-          <p:cNvPr id="5" name="Imagen 4">
-            <a:extLst>
-              <a:ext uri="{FF2B5EF4-FFF2-40B4-BE49-F238E27FC236}">
-                <a16:creationId xmlns:a16="http://schemas.microsoft.com/office/drawing/2014/main" id="{C2E802C4-71FE-EDD2-1BD8-4FC4341F524B}"/>
+          <p:cNvPr id="4" name="Imagen 3">
+            <a:extLst>
+              <a:ext uri="{FF2B5EF4-FFF2-40B4-BE49-F238E27FC236}">
+                <a16:creationId xmlns:a16="http://schemas.microsoft.com/office/drawing/2014/main" id="{6F60FC67-D94F-08E0-F950-B442DE8C6E43}"/>
               </a:ext>
             </a:extLst>
           </p:cNvPr>
@@ -4440,20 +4723,80 @@
         </p:blipFill>
         <p:spPr>
           <a:xfrm>
-            <a:off x="508262" y="868351"/>
-            <a:ext cx="6974564" cy="4140256"/>
+            <a:off x="529823" y="1310050"/>
+            <a:ext cx="4918869" cy="3281078"/>
           </a:xfrm>
           <a:prstGeom prst="rect">
             <a:avLst/>
           </a:prstGeom>
         </p:spPr>
       </p:pic>
-      <p:sp>
-        <p:nvSpPr>
-          <p:cNvPr id="7" name="CuadroTexto 6">
-            <a:extLst>
-              <a:ext uri="{FF2B5EF4-FFF2-40B4-BE49-F238E27FC236}">
-                <a16:creationId xmlns:a16="http://schemas.microsoft.com/office/drawing/2014/main" id="{1A57D694-AE9B-FCD6-0FEE-46229FDB4B8F}"/>
+      <p:pic>
+        <p:nvPicPr>
+          <p:cNvPr id="8" name="Imagen 7">
+            <a:extLst>
+              <a:ext uri="{FF2B5EF4-FFF2-40B4-BE49-F238E27FC236}">
+                <a16:creationId xmlns:a16="http://schemas.microsoft.com/office/drawing/2014/main" id="{E956D10B-F0FC-080E-F5D0-DB39C2C2A565}"/>
+              </a:ext>
+            </a:extLst>
+          </p:cNvPr>
+          <p:cNvPicPr>
+            <a:picLocks noChangeAspect="1"/>
+          </p:cNvPicPr>
+          <p:nvPr/>
+        </p:nvPicPr>
+        <p:blipFill>
+          <a:blip r:embed="rId3"/>
+          <a:stretch>
+            <a:fillRect/>
+          </a:stretch>
+        </p:blipFill>
+        <p:spPr>
+          <a:xfrm>
+            <a:off x="7024485" y="1206631"/>
+            <a:ext cx="3313079" cy="2222369"/>
+          </a:xfrm>
+          <a:prstGeom prst="rect">
+            <a:avLst/>
+          </a:prstGeom>
+        </p:spPr>
+      </p:pic>
+      <p:pic>
+        <p:nvPicPr>
+          <p:cNvPr id="11" name="Imagen 10">
+            <a:extLst>
+              <a:ext uri="{FF2B5EF4-FFF2-40B4-BE49-F238E27FC236}">
+                <a16:creationId xmlns:a16="http://schemas.microsoft.com/office/drawing/2014/main" id="{49284FE2-089D-9896-B891-A8E6498F912F}"/>
+              </a:ext>
+            </a:extLst>
+          </p:cNvPr>
+          <p:cNvPicPr>
+            <a:picLocks noChangeAspect="1"/>
+          </p:cNvPicPr>
+          <p:nvPr/>
+        </p:nvPicPr>
+        <p:blipFill>
+          <a:blip r:embed="rId4"/>
+          <a:stretch>
+            <a:fillRect/>
+          </a:stretch>
+        </p:blipFill>
+        <p:spPr>
+          <a:xfrm>
+            <a:off x="7099733" y="3429000"/>
+            <a:ext cx="3162582" cy="2144245"/>
+          </a:xfrm>
+          <a:prstGeom prst="rect">
+            <a:avLst/>
+          </a:prstGeom>
+        </p:spPr>
+      </p:pic>
+      <p:sp>
+        <p:nvSpPr>
+          <p:cNvPr id="12" name="CuadroTexto 11">
+            <a:extLst>
+              <a:ext uri="{FF2B5EF4-FFF2-40B4-BE49-F238E27FC236}">
+                <a16:creationId xmlns:a16="http://schemas.microsoft.com/office/drawing/2014/main" id="{AA2C65BD-1A3E-4438-C456-FF5D15C26187}"/>
               </a:ext>
             </a:extLst>
           </p:cNvPr>
@@ -4462,8 +4805,8 @@
         </p:nvSpPr>
         <p:spPr>
           <a:xfrm>
-            <a:off x="7911446" y="761290"/>
-            <a:ext cx="3772292" cy="4247317"/>
+            <a:off x="6589174" y="5935662"/>
+            <a:ext cx="5269428" cy="369332"/>
           </a:xfrm>
           <a:prstGeom prst="rect">
             <a:avLst/>
@@ -4476,335 +4819,30 @@
           </a:bodyPr>
           <a:lstStyle/>
           <a:p>
-            <a:pPr algn="just"/>
-            <a:r>
-              <a:rPr lang="es-ES" dirty="0"/>
-              <a:t>Los datos muestran que, para el mismo tipo de alojamiento (</a:t>
-            </a:r>
-            <a:r>
-              <a:rPr lang="es-ES" b="1" dirty="0" err="1"/>
-              <a:t>Entire</a:t>
-            </a:r>
-            <a:r>
-              <a:rPr lang="es-ES" b="1" dirty="0"/>
-              <a:t> home/</a:t>
-            </a:r>
-            <a:r>
-              <a:rPr lang="es-ES" b="1" dirty="0" err="1"/>
-              <a:t>apt</a:t>
-            </a:r>
-            <a:r>
-              <a:rPr lang="es-ES" dirty="0"/>
-              <a:t>), el </a:t>
-            </a:r>
-            <a:r>
-              <a:rPr lang="es-ES" b="1" dirty="0"/>
-              <a:t>Este</a:t>
-            </a:r>
-            <a:r>
-              <a:rPr lang="es-ES" dirty="0"/>
-              <a:t> presenta un precio medio superior al del </a:t>
-            </a:r>
-            <a:r>
-              <a:rPr lang="es-ES" b="1" dirty="0"/>
-              <a:t>Centro</a:t>
+            <a:r>
+              <a:rPr lang="es-ES" b="1" dirty="0">
+                <a:solidFill>
+                  <a:srgbClr val="FF0000"/>
+                </a:solidFill>
+              </a:rPr>
+              <a:t>Las reseñas y la disponibilidad NO explican el precio</a:t>
             </a:r>
             <a:r>
               <a:rPr lang="es-ES" dirty="0"/>
               <a:t>.</a:t>
             </a:r>
-          </a:p>
-          <a:p>
-            <a:pPr marL="285750" indent="-285750" algn="just">
-              <a:buFont typeface="Arial" panose="020B0604020202020204" pitchFamily="34" charset="0"/>
-              <a:buChar char="•"/>
-            </a:pPr>
-            <a:endParaRPr lang="es-ES" dirty="0"/>
-          </a:p>
-          <a:p>
-            <a:pPr marL="285750" indent="-285750" algn="just">
-              <a:buFont typeface="Arial" panose="020B0604020202020204" pitchFamily="34" charset="0"/>
-              <a:buChar char="•"/>
-            </a:pPr>
-            <a:r>
-              <a:rPr lang="es-ES" dirty="0"/>
-              <a:t>Centro: </a:t>
-            </a:r>
-            <a:r>
-              <a:rPr lang="es-ES" b="1" dirty="0"/>
-              <a:t>123 €</a:t>
-            </a:r>
-            <a:endParaRPr lang="es-ES" dirty="0"/>
-          </a:p>
-          <a:p>
-            <a:pPr marL="285750" indent="-285750" algn="just">
-              <a:buFont typeface="Arial" panose="020B0604020202020204" pitchFamily="34" charset="0"/>
-              <a:buChar char="•"/>
-            </a:pPr>
-            <a:r>
-              <a:rPr lang="es-ES" dirty="0"/>
-              <a:t>Este: </a:t>
-            </a:r>
-            <a:r>
-              <a:rPr lang="es-ES" b="1" dirty="0"/>
-              <a:t>143 €</a:t>
-            </a:r>
-          </a:p>
-          <a:p>
-            <a:pPr algn="just"/>
-            <a:endParaRPr lang="es-ES" dirty="0"/>
-          </a:p>
-          <a:p>
-            <a:pPr algn="just"/>
-            <a:r>
-              <a:rPr lang="es-ES" dirty="0"/>
-              <a:t>Esta diferencia refleja un claro </a:t>
-            </a:r>
-            <a:r>
-              <a:rPr lang="es-ES" b="1" dirty="0"/>
-              <a:t>premium de localización</a:t>
-            </a:r>
-            <a:r>
-              <a:rPr lang="es-ES" dirty="0"/>
-              <a:t>: la zona Este combina menor oferta, mayor atractivo de playa y alojamientos potencialmente más amplios o de mayor calidad, lo que eleva el precio medio respecto al Centro.</a:t>
-            </a:r>
+            <a:endParaRPr lang="es-ES" b="1" dirty="0">
+              <a:solidFill>
+                <a:srgbClr val="FF0000"/>
+              </a:solidFill>
+            </a:endParaRPr>
           </a:p>
         </p:txBody>
       </p:sp>
     </p:spTree>
     <p:extLst>
       <p:ext uri="{BB962C8B-B14F-4D97-AF65-F5344CB8AC3E}">
-        <p14:creationId xmlns:p14="http://schemas.microsoft.com/office/powerpoint/2010/main" val="742651258"/>
-      </p:ext>
-    </p:extLst>
-  </p:cSld>
-  <p:clrMapOvr>
-    <a:masterClrMapping/>
-  </p:clrMapOvr>
-</p:sld>
-</file>
-
-<file path=ppt/slides/slide8.xml><?xml version="1.0" encoding="utf-8"?>
-<p:sld xmlns:a="http://schemas.openxmlformats.org/drawingml/2006/main" xmlns:r="http://schemas.openxmlformats.org/officeDocument/2006/relationships" xmlns:p="http://schemas.openxmlformats.org/presentationml/2006/main">
-  <p:cSld>
-    <p:spTree>
-      <p:nvGrpSpPr>
-        <p:cNvPr id="1" name=""/>
-        <p:cNvGrpSpPr/>
-        <p:nvPr/>
-      </p:nvGrpSpPr>
-      <p:grpSpPr>
-        <a:xfrm>
-          <a:off x="0" y="0"/>
-          <a:ext cx="0" cy="0"/>
-          <a:chOff x="0" y="0"/>
-          <a:chExt cx="0" cy="0"/>
-        </a:xfrm>
-      </p:grpSpPr>
-      <p:sp>
-        <p:nvSpPr>
-          <p:cNvPr id="5" name="CuadroTexto 4">
-            <a:extLst>
-              <a:ext uri="{FF2B5EF4-FFF2-40B4-BE49-F238E27FC236}">
-                <a16:creationId xmlns:a16="http://schemas.microsoft.com/office/drawing/2014/main" id="{E9861F12-A260-DB13-0D9E-45653071B033}"/>
-              </a:ext>
-            </a:extLst>
-          </p:cNvPr>
-          <p:cNvSpPr txBox="1"/>
-          <p:nvPr/>
-        </p:nvSpPr>
-        <p:spPr>
-          <a:xfrm>
-            <a:off x="1247087" y="1652869"/>
-            <a:ext cx="9697825" cy="3693319"/>
-          </a:xfrm>
-          <a:prstGeom prst="rect">
-            <a:avLst/>
-          </a:prstGeom>
-          <a:noFill/>
-        </p:spPr>
-        <p:txBody>
-          <a:bodyPr wrap="square">
-            <a:spAutoFit/>
-          </a:bodyPr>
-          <a:lstStyle/>
-          <a:p>
-            <a:pPr algn="just">
-              <a:buNone/>
-            </a:pPr>
-            <a:r>
-              <a:rPr lang="es-ES" dirty="0">
-                <a:effectLst/>
-              </a:rPr>
-              <a:t>El análisis muestra que el </a:t>
-            </a:r>
-            <a:r>
-              <a:rPr lang="es-ES" b="1" dirty="0">
-                <a:effectLst/>
-              </a:rPr>
-              <a:t>Centro</a:t>
-            </a:r>
-            <a:r>
-              <a:rPr lang="es-ES" dirty="0">
-                <a:effectLst/>
-              </a:rPr>
-              <a:t>, pese a ser la zona con mayor volumen de alojamientos y actividad turística, </a:t>
-            </a:r>
-            <a:r>
-              <a:rPr lang="es-ES" b="1" dirty="0">
-                <a:effectLst/>
-              </a:rPr>
-              <a:t>no es el barrio más caro</a:t>
-            </a:r>
-            <a:r>
-              <a:rPr lang="es-ES" dirty="0">
-                <a:effectLst/>
-              </a:rPr>
-              <a:t>. El </a:t>
-            </a:r>
-            <a:r>
-              <a:rPr lang="es-ES" b="1" dirty="0">
-                <a:effectLst/>
-              </a:rPr>
-              <a:t>Este</a:t>
-            </a:r>
-            <a:r>
-              <a:rPr lang="es-ES" dirty="0">
-                <a:effectLst/>
-              </a:rPr>
-              <a:t> presenta precios medios superiores, incluso cuando se compara el mismo tipo de alojamiento, lo que evidencia un </a:t>
-            </a:r>
-            <a:r>
-              <a:rPr lang="es-ES" b="1" dirty="0">
-                <a:effectLst/>
-              </a:rPr>
-              <a:t>premium de localización</a:t>
-            </a:r>
-            <a:r>
-              <a:rPr lang="es-ES" dirty="0">
-                <a:effectLst/>
-              </a:rPr>
-              <a:t> asociado a su entorno de playa, menor competencia y características de los alojamientos.</a:t>
-            </a:r>
-            <a:endParaRPr lang="es-ES" dirty="0"/>
-          </a:p>
-          <a:p>
-            <a:pPr algn="just">
-              <a:buNone/>
-            </a:pPr>
-            <a:endParaRPr lang="es-ES" dirty="0">
-              <a:effectLst/>
-            </a:endParaRPr>
-          </a:p>
-          <a:p>
-            <a:pPr algn="just">
-              <a:buNone/>
-            </a:pPr>
-            <a:r>
-              <a:rPr lang="es-ES" dirty="0">
-                <a:effectLst/>
-              </a:rPr>
-              <a:t>Además, la capacidad del alojamiento es el factor que </a:t>
-            </a:r>
-            <a:r>
-              <a:rPr lang="es-ES" b="1" dirty="0">
-                <a:effectLst/>
-              </a:rPr>
-              <a:t>más influye en el precio</a:t>
-            </a:r>
-            <a:r>
-              <a:rPr lang="es-ES" dirty="0">
-                <a:effectLst/>
-              </a:rPr>
-              <a:t>, mientras que la valoración y la disponibilidad tienen un impacto mínimo. Al aplicar un umbral mínimo de </a:t>
-            </a:r>
-            <a:r>
-              <a:rPr lang="es-ES" b="1" dirty="0">
-                <a:effectLst/>
-              </a:rPr>
-              <a:t>200 alojamientos por barrio</a:t>
-            </a:r>
-            <a:r>
-              <a:rPr lang="es-ES" dirty="0">
-                <a:effectLst/>
-              </a:rPr>
-              <a:t>, garantizamos un análisis representativo y evitamos sesgos derivados de muestras pequeñas.</a:t>
-            </a:r>
-          </a:p>
-          <a:p>
-            <a:pPr algn="just">
-              <a:buNone/>
-            </a:pPr>
-            <a:endParaRPr lang="es-ES" dirty="0"/>
-          </a:p>
-          <a:p>
-            <a:pPr algn="just">
-              <a:buNone/>
-            </a:pPr>
-            <a:r>
-              <a:rPr lang="es-ES" dirty="0">
-                <a:effectLst/>
-              </a:rPr>
-              <a:t>En conjunto, los resultados confirman que </a:t>
-            </a:r>
-            <a:r>
-              <a:rPr lang="es-ES" b="1" dirty="0">
-                <a:effectLst/>
-              </a:rPr>
-              <a:t>la localización y el tamaño del alojamiento</a:t>
-            </a:r>
-            <a:r>
-              <a:rPr lang="es-ES" dirty="0">
-                <a:effectLst/>
-              </a:rPr>
-              <a:t> son los principales determinantes del precio en Airbnb Málaga, y que el comportamiento del mercado no siempre coincide con la intuición inicial de que el Centro sería la zona más cara</a:t>
-            </a:r>
-            <a:endParaRPr lang="es-ES" dirty="0"/>
-          </a:p>
-        </p:txBody>
-      </p:sp>
-      <p:sp>
-        <p:nvSpPr>
-          <p:cNvPr id="6" name="Marcador de contenido 2">
-            <a:extLst>
-              <a:ext uri="{FF2B5EF4-FFF2-40B4-BE49-F238E27FC236}">
-                <a16:creationId xmlns:a16="http://schemas.microsoft.com/office/drawing/2014/main" id="{84656C70-C30E-D9F3-6992-A54F019588FB}"/>
-              </a:ext>
-            </a:extLst>
-          </p:cNvPr>
-          <p:cNvSpPr>
-            <a:spLocks noGrp="1"/>
-          </p:cNvSpPr>
-          <p:nvPr>
-            <p:ph idx="1"/>
-          </p:nvPr>
-        </p:nvSpPr>
-        <p:spPr>
-          <a:xfrm>
-            <a:off x="338578" y="553006"/>
-            <a:ext cx="10785049" cy="653625"/>
-          </a:xfrm>
-        </p:spPr>
-        <p:txBody>
-          <a:bodyPr>
-            <a:normAutofit/>
-          </a:bodyPr>
-          <a:lstStyle/>
-          <a:p>
-            <a:pPr marL="0" indent="0" algn="ctr">
-              <a:buNone/>
-            </a:pPr>
-            <a:r>
-              <a:rPr lang="es-ES" sz="4000" b="1" dirty="0"/>
-              <a:t>CONCLUSIÓN HIPÓTESIS 1</a:t>
-            </a:r>
-          </a:p>
-        </p:txBody>
-      </p:sp>
-    </p:spTree>
-    <p:extLst>
-      <p:ext uri="{BB962C8B-B14F-4D97-AF65-F5344CB8AC3E}">
-        <p14:creationId xmlns:p14="http://schemas.microsoft.com/office/powerpoint/2010/main" val="3191711258"/>
+        <p14:creationId xmlns:p14="http://schemas.microsoft.com/office/powerpoint/2010/main" val="2888215945"/>
       </p:ext>
     </p:extLst>
   </p:cSld>

--- a/Pendiente/EDA - Alquileres Málaga - 2025.pptx
+++ b/Pendiente/EDA - Alquileres Málaga - 2025.pptx
@@ -11,6 +11,7 @@
     <p:sldId id="268" r:id="rId5"/>
     <p:sldId id="267" r:id="rId6"/>
     <p:sldId id="269" r:id="rId7"/>
+    <p:sldId id="270" r:id="rId8"/>
   </p:sldIdLst>
   <p:sldSz cx="12192000" cy="6858000"/>
   <p:notesSz cx="6858000" cy="9144000"/>
@@ -334,6 +335,18 @@
   <p:clrMapOvr>
     <a:masterClrMapping/>
   </p:clrMapOvr>
+  <mc:AlternateContent xmlns:mc="http://schemas.openxmlformats.org/markup-compatibility/2006">
+    <mc:Choice xmlns:p14="http://schemas.microsoft.com/office/powerpoint/2010/main" Requires="p14">
+      <p:transition spd="slow" p14:dur="3400" advTm="0">
+        <p14:reveal/>
+      </p:transition>
+    </mc:Choice>
+    <mc:Fallback>
+      <p:transition spd="slow" advTm="0">
+        <p:fade/>
+      </p:transition>
+    </mc:Fallback>
+  </mc:AlternateContent>
 </p:sldLayout>
 </file>
 
@@ -532,6 +545,18 @@
   <p:clrMapOvr>
     <a:masterClrMapping/>
   </p:clrMapOvr>
+  <mc:AlternateContent xmlns:mc="http://schemas.openxmlformats.org/markup-compatibility/2006">
+    <mc:Choice xmlns:p14="http://schemas.microsoft.com/office/powerpoint/2010/main" Requires="p14">
+      <p:transition spd="slow" p14:dur="3400" advTm="0">
+        <p14:reveal/>
+      </p:transition>
+    </mc:Choice>
+    <mc:Fallback>
+      <p:transition spd="slow" advTm="0">
+        <p:fade/>
+      </p:transition>
+    </mc:Fallback>
+  </mc:AlternateContent>
 </p:sldLayout>
 </file>
 
@@ -740,6 +765,18 @@
   <p:clrMapOvr>
     <a:masterClrMapping/>
   </p:clrMapOvr>
+  <mc:AlternateContent xmlns:mc="http://schemas.openxmlformats.org/markup-compatibility/2006">
+    <mc:Choice xmlns:p14="http://schemas.microsoft.com/office/powerpoint/2010/main" Requires="p14">
+      <p:transition spd="slow" p14:dur="3400" advTm="0">
+        <p14:reveal/>
+      </p:transition>
+    </mc:Choice>
+    <mc:Fallback>
+      <p:transition spd="slow" advTm="0">
+        <p:fade/>
+      </p:transition>
+    </mc:Fallback>
+  </mc:AlternateContent>
 </p:sldLayout>
 </file>
 
@@ -938,6 +975,18 @@
   <p:clrMapOvr>
     <a:masterClrMapping/>
   </p:clrMapOvr>
+  <mc:AlternateContent xmlns:mc="http://schemas.openxmlformats.org/markup-compatibility/2006">
+    <mc:Choice xmlns:p14="http://schemas.microsoft.com/office/powerpoint/2010/main" Requires="p14">
+      <p:transition spd="slow" p14:dur="3400" advTm="0">
+        <p14:reveal/>
+      </p:transition>
+    </mc:Choice>
+    <mc:Fallback>
+      <p:transition spd="slow" advTm="0">
+        <p:fade/>
+      </p:transition>
+    </mc:Fallback>
+  </mc:AlternateContent>
 </p:sldLayout>
 </file>
 
@@ -1213,6 +1262,18 @@
   <p:clrMapOvr>
     <a:masterClrMapping/>
   </p:clrMapOvr>
+  <mc:AlternateContent xmlns:mc="http://schemas.openxmlformats.org/markup-compatibility/2006">
+    <mc:Choice xmlns:p14="http://schemas.microsoft.com/office/powerpoint/2010/main" Requires="p14">
+      <p:transition spd="slow" p14:dur="3400" advTm="0">
+        <p14:reveal/>
+      </p:transition>
+    </mc:Choice>
+    <mc:Fallback>
+      <p:transition spd="slow" advTm="0">
+        <p:fade/>
+      </p:transition>
+    </mc:Fallback>
+  </mc:AlternateContent>
 </p:sldLayout>
 </file>
 
@@ -1478,6 +1539,18 @@
   <p:clrMapOvr>
     <a:masterClrMapping/>
   </p:clrMapOvr>
+  <mc:AlternateContent xmlns:mc="http://schemas.openxmlformats.org/markup-compatibility/2006">
+    <mc:Choice xmlns:p14="http://schemas.microsoft.com/office/powerpoint/2010/main" Requires="p14">
+      <p:transition spd="slow" p14:dur="3400" advTm="0">
+        <p14:reveal/>
+      </p:transition>
+    </mc:Choice>
+    <mc:Fallback>
+      <p:transition spd="slow" advTm="0">
+        <p:fade/>
+      </p:transition>
+    </mc:Fallback>
+  </mc:AlternateContent>
 </p:sldLayout>
 </file>
 
@@ -1890,6 +1963,18 @@
   <p:clrMapOvr>
     <a:masterClrMapping/>
   </p:clrMapOvr>
+  <mc:AlternateContent xmlns:mc="http://schemas.openxmlformats.org/markup-compatibility/2006">
+    <mc:Choice xmlns:p14="http://schemas.microsoft.com/office/powerpoint/2010/main" Requires="p14">
+      <p:transition spd="slow" p14:dur="3400" advTm="0">
+        <p14:reveal/>
+      </p:transition>
+    </mc:Choice>
+    <mc:Fallback>
+      <p:transition spd="slow" advTm="0">
+        <p:fade/>
+      </p:transition>
+    </mc:Fallback>
+  </mc:AlternateContent>
 </p:sldLayout>
 </file>
 
@@ -2031,6 +2116,18 @@
   <p:clrMapOvr>
     <a:masterClrMapping/>
   </p:clrMapOvr>
+  <mc:AlternateContent xmlns:mc="http://schemas.openxmlformats.org/markup-compatibility/2006">
+    <mc:Choice xmlns:p14="http://schemas.microsoft.com/office/powerpoint/2010/main" Requires="p14">
+      <p:transition spd="slow" p14:dur="3400" advTm="0">
+        <p14:reveal/>
+      </p:transition>
+    </mc:Choice>
+    <mc:Fallback>
+      <p:transition spd="slow" advTm="0">
+        <p:fade/>
+      </p:transition>
+    </mc:Fallback>
+  </mc:AlternateContent>
 </p:sldLayout>
 </file>
 
@@ -2144,6 +2241,18 @@
   <p:clrMapOvr>
     <a:masterClrMapping/>
   </p:clrMapOvr>
+  <mc:AlternateContent xmlns:mc="http://schemas.openxmlformats.org/markup-compatibility/2006">
+    <mc:Choice xmlns:p14="http://schemas.microsoft.com/office/powerpoint/2010/main" Requires="p14">
+      <p:transition spd="slow" p14:dur="3400" advTm="0">
+        <p14:reveal/>
+      </p:transition>
+    </mc:Choice>
+    <mc:Fallback>
+      <p:transition spd="slow" advTm="0">
+        <p:fade/>
+      </p:transition>
+    </mc:Fallback>
+  </mc:AlternateContent>
 </p:sldLayout>
 </file>
 
@@ -2455,6 +2564,18 @@
   <p:clrMapOvr>
     <a:masterClrMapping/>
   </p:clrMapOvr>
+  <mc:AlternateContent xmlns:mc="http://schemas.openxmlformats.org/markup-compatibility/2006">
+    <mc:Choice xmlns:p14="http://schemas.microsoft.com/office/powerpoint/2010/main" Requires="p14">
+      <p:transition spd="slow" p14:dur="3400" advTm="0">
+        <p14:reveal/>
+      </p:transition>
+    </mc:Choice>
+    <mc:Fallback>
+      <p:transition spd="slow" advTm="0">
+        <p:fade/>
+      </p:transition>
+    </mc:Fallback>
+  </mc:AlternateContent>
 </p:sldLayout>
 </file>
 
@@ -2743,6 +2864,18 @@
   <p:clrMapOvr>
     <a:masterClrMapping/>
   </p:clrMapOvr>
+  <mc:AlternateContent xmlns:mc="http://schemas.openxmlformats.org/markup-compatibility/2006">
+    <mc:Choice xmlns:p14="http://schemas.microsoft.com/office/powerpoint/2010/main" Requires="p14">
+      <p:transition spd="slow" p14:dur="3400" advTm="0">
+        <p14:reveal/>
+      </p:transition>
+    </mc:Choice>
+    <mc:Fallback>
+      <p:transition spd="slow" advTm="0">
+        <p:fade/>
+      </p:transition>
+    </mc:Fallback>
+  </mc:AlternateContent>
 </p:sldLayout>
 </file>
 
@@ -3031,6 +3164,18 @@
     <p:sldLayoutId id="2147483658" r:id="rId10"/>
     <p:sldLayoutId id="2147483659" r:id="rId11"/>
   </p:sldLayoutIdLst>
+  <mc:AlternateContent xmlns:mc="http://schemas.openxmlformats.org/markup-compatibility/2006">
+    <mc:Choice xmlns:p14="http://schemas.microsoft.com/office/powerpoint/2010/main" Requires="p14">
+      <p:transition spd="slow" p14:dur="3400" advTm="0">
+        <p14:reveal/>
+      </p:transition>
+    </mc:Choice>
+    <mc:Fallback>
+      <p:transition spd="slow" advTm="0">
+        <p:fade/>
+      </p:transition>
+    </mc:Fallback>
+  </mc:AlternateContent>
   <p:txStyles>
     <p:titleStyle>
       <a:lvl1pPr algn="l" defTabSz="914400" rtl="0" eaLnBrk="1" latinLnBrk="0" hangingPunct="1">
@@ -3383,8 +3528,8 @@
         </p:nvSpPr>
         <p:spPr>
           <a:xfrm>
-            <a:off x="564822" y="2236585"/>
-            <a:ext cx="10596513" cy="3416320"/>
+            <a:off x="835056" y="3429000"/>
+            <a:ext cx="10596513" cy="2585323"/>
           </a:xfrm>
           <a:prstGeom prst="rect">
             <a:avLst/>
@@ -3401,21 +3546,7 @@
               <a:buFont typeface="Wingdings" panose="05000000000000000000" pitchFamily="2" charset="2"/>
               <a:buChar char="q"/>
             </a:pPr>
-            <a:r>
-              <a:rPr lang="es-ES" b="1" dirty="0"/>
-              <a:t>Objetivo principal: </a:t>
-            </a:r>
-          </a:p>
-          <a:p>
-            <a:pPr algn="just"/>
-            <a:endParaRPr lang="es-ES" b="1" dirty="0"/>
-          </a:p>
-          <a:p>
-            <a:pPr algn="just"/>
-            <a:r>
-              <a:rPr lang="es-ES" dirty="0"/>
-              <a:t>Entender los factores que influyen en el precio, la oferta y la demanda de alojamientos turísticos en Málaga.</a:t>
-            </a:r>
+            <a:endParaRPr lang="es-ES" dirty="0"/>
           </a:p>
           <a:p>
             <a:pPr marL="285750" indent="-285750" algn="just">
@@ -3429,13 +3560,6 @@
               <a:buFont typeface="Wingdings" panose="05000000000000000000" pitchFamily="2" charset="2"/>
               <a:buChar char="q"/>
             </a:pPr>
-            <a:endParaRPr lang="es-ES" dirty="0"/>
-          </a:p>
-          <a:p>
-            <a:pPr marL="285750" indent="-285750" algn="just">
-              <a:buFont typeface="Wingdings" panose="05000000000000000000" pitchFamily="2" charset="2"/>
-              <a:buChar char="q"/>
-            </a:pPr>
             <a:r>
               <a:rPr lang="es-ES" b="1" dirty="0"/>
               <a:t>Objetivos específicos:</a:t>
@@ -3491,6 +3615,56 @@
           <a:p>
             <a:pPr algn="just"/>
             <a:endParaRPr lang="es-ES" dirty="0"/>
+          </a:p>
+        </p:txBody>
+      </p:sp>
+      <p:sp>
+        <p:nvSpPr>
+          <p:cNvPr id="4" name="CuadroTexto 3">
+            <a:extLst>
+              <a:ext uri="{FF2B5EF4-FFF2-40B4-BE49-F238E27FC236}">
+                <a16:creationId xmlns:a16="http://schemas.microsoft.com/office/drawing/2014/main" id="{20275CC9-14C7-0BEF-A7ED-2DE620B1B419}"/>
+              </a:ext>
+            </a:extLst>
+          </p:cNvPr>
+          <p:cNvSpPr txBox="1"/>
+          <p:nvPr/>
+        </p:nvSpPr>
+        <p:spPr>
+          <a:xfrm>
+            <a:off x="835056" y="2269119"/>
+            <a:ext cx="10244579" cy="923330"/>
+          </a:xfrm>
+          <a:prstGeom prst="rect">
+            <a:avLst/>
+          </a:prstGeom>
+          <a:noFill/>
+        </p:spPr>
+        <p:txBody>
+          <a:bodyPr wrap="square">
+            <a:spAutoFit/>
+          </a:bodyPr>
+          <a:lstStyle/>
+          <a:p>
+            <a:pPr marL="285750" indent="-285750" algn="just">
+              <a:buFont typeface="Wingdings" panose="05000000000000000000" pitchFamily="2" charset="2"/>
+              <a:buChar char="q"/>
+            </a:pPr>
+            <a:r>
+              <a:rPr lang="es-ES" b="1" dirty="0"/>
+              <a:t>Objetivo principal: </a:t>
+            </a:r>
+          </a:p>
+          <a:p>
+            <a:pPr algn="just"/>
+            <a:endParaRPr lang="es-ES" b="1" dirty="0"/>
+          </a:p>
+          <a:p>
+            <a:pPr algn="just"/>
+            <a:r>
+              <a:rPr lang="es-ES" dirty="0"/>
+              <a:t>Entender los factores que influyen en el precio, la oferta y la demanda de alojamientos turísticos en Málaga.</a:t>
+            </a:r>
           </a:p>
         </p:txBody>
       </p:sp>
@@ -3504,6 +3678,18 @@
   <p:clrMapOvr>
     <a:masterClrMapping/>
   </p:clrMapOvr>
+  <mc:AlternateContent xmlns:mc="http://schemas.openxmlformats.org/markup-compatibility/2006">
+    <mc:Choice xmlns:p14="http://schemas.microsoft.com/office/powerpoint/2010/main" Requires="p14">
+      <p:transition spd="med" p14:dur="700">
+        <p:fade/>
+      </p:transition>
+    </mc:Choice>
+    <mc:Fallback>
+      <p:transition spd="med">
+        <p:fade/>
+      </p:transition>
+    </mc:Fallback>
+  </mc:AlternateContent>
 </p:sld>
 </file>
 
@@ -3565,8 +3751,9 @@
             <a:endParaRPr lang="es-ES" sz="2000" dirty="0"/>
           </a:p>
           <a:p>
-            <a:pPr marL="0" indent="0" algn="just">
-              <a:buNone/>
+            <a:pPr algn="just">
+              <a:buFont typeface="Wingdings" panose="05000000000000000000" pitchFamily="2" charset="2"/>
+              <a:buChar char="Ø"/>
             </a:pPr>
             <a:r>
               <a:rPr lang="es-ES" sz="2000" b="1" dirty="0"/>
@@ -3578,14 +3765,16 @@
             </a:r>
           </a:p>
           <a:p>
-            <a:pPr marL="0" indent="0" algn="just">
-              <a:buNone/>
+            <a:pPr algn="just">
+              <a:buFont typeface="Wingdings" panose="05000000000000000000" pitchFamily="2" charset="2"/>
+              <a:buChar char="Ø"/>
             </a:pPr>
             <a:endParaRPr lang="es-ES" sz="2000" dirty="0"/>
           </a:p>
           <a:p>
-            <a:pPr marL="0" indent="0" algn="just">
-              <a:buNone/>
+            <a:pPr algn="just">
+              <a:buFont typeface="Wingdings" panose="05000000000000000000" pitchFamily="2" charset="2"/>
+              <a:buChar char="Ø"/>
             </a:pPr>
             <a:r>
               <a:rPr lang="es-ES" sz="2000" b="1" dirty="0"/>
@@ -3597,14 +3786,16 @@
             </a:r>
           </a:p>
           <a:p>
-            <a:pPr marL="0" indent="0" algn="just">
-              <a:buNone/>
+            <a:pPr algn="just">
+              <a:buFont typeface="Wingdings" panose="05000000000000000000" pitchFamily="2" charset="2"/>
+              <a:buChar char="Ø"/>
             </a:pPr>
             <a:endParaRPr lang="es-ES" sz="2000" dirty="0"/>
           </a:p>
           <a:p>
-            <a:pPr marL="0" indent="0" algn="just">
-              <a:buNone/>
+            <a:pPr algn="just">
+              <a:buFont typeface="Wingdings" panose="05000000000000000000" pitchFamily="2" charset="2"/>
+              <a:buChar char="Ø"/>
             </a:pPr>
             <a:r>
               <a:rPr lang="es-ES" sz="2000" b="1" dirty="0"/>
@@ -3612,15 +3803,7 @@
             </a:r>
             <a:r>
               <a:rPr lang="es-ES" sz="2000" dirty="0"/>
-              <a:t>La demanda de alojamientos en Málaga (medida por el volumen de reseñas mensuales) presenta un pico de crecimiento superior al 50% durante el tercer </a:t>
-            </a:r>
-            <a:r>
-              <a:rPr lang="es-ES" sz="2000" dirty="0" err="1"/>
-              <a:t>trimestrs</a:t>
-            </a:r>
-            <a:r>
-              <a:rPr lang="es-ES" sz="2000" dirty="0"/>
-              <a:t> del año (julio, agosto, septiembre), siendo el Distrito Centro el que mantiene una demanda más estable durante el resto del año frente a las otras zonas.</a:t>
+              <a:t>La demanda de alojamientos en Málaga (medida por el volumen de reseñas mensuales) presenta un pico de crecimiento superior al 50% durante el tercer trimestre del año (julio, agosto, septiembre), siendo el Distrito Centro el que mantiene una demanda más estable durante el resto del año frente a las otras zonas.</a:t>
             </a:r>
           </a:p>
           <a:p>
@@ -3638,6 +3821,14 @@
   <p:clrMapOvr>
     <a:masterClrMapping/>
   </p:clrMapOvr>
+  <mc:AlternateContent xmlns:mc="http://schemas.openxmlformats.org/markup-compatibility/2006">
+    <mc:Choice xmlns:p14="http://schemas.microsoft.com/office/powerpoint/2010/main" Requires="p14">
+      <p:transition p14:dur="0"/>
+    </mc:Choice>
+    <mc:Fallback>
+      <p:transition/>
+    </mc:Fallback>
+  </mc:AlternateContent>
 </p:sld>
 </file>
 
@@ -3878,6 +4069,14 @@
   <p:clrMapOvr>
     <a:masterClrMapping/>
   </p:clrMapOvr>
+  <mc:AlternateContent xmlns:mc="http://schemas.openxmlformats.org/markup-compatibility/2006">
+    <mc:Choice xmlns:p14="http://schemas.microsoft.com/office/powerpoint/2010/main" Requires="p14">
+      <p:transition p14:dur="0"/>
+    </mc:Choice>
+    <mc:Fallback>
+      <p:transition/>
+    </mc:Fallback>
+  </mc:AlternateContent>
 </p:sld>
 </file>
 
@@ -4210,6 +4409,14 @@
   <p:clrMapOvr>
     <a:masterClrMapping/>
   </p:clrMapOvr>
+  <mc:AlternateContent xmlns:mc="http://schemas.openxmlformats.org/markup-compatibility/2006">
+    <mc:Choice xmlns:p14="http://schemas.microsoft.com/office/powerpoint/2010/main" Requires="p14">
+      <p:transition p14:dur="0"/>
+    </mc:Choice>
+    <mc:Fallback>
+      <p:transition/>
+    </mc:Fallback>
+  </mc:AlternateContent>
 </p:sld>
 </file>
 
@@ -4485,8 +4692,8 @@
         </p:nvSpPr>
         <p:spPr>
           <a:xfrm>
-            <a:off x="7145671" y="5052817"/>
-            <a:ext cx="4477578" cy="1754326"/>
+            <a:off x="6844013" y="5048053"/>
+            <a:ext cx="4867065" cy="1754326"/>
           </a:xfrm>
           <a:prstGeom prst="rect">
             <a:avLst/>
@@ -4548,6 +4755,14 @@
   <p:clrMapOvr>
     <a:masterClrMapping/>
   </p:clrMapOvr>
+  <mc:AlternateContent xmlns:mc="http://schemas.openxmlformats.org/markup-compatibility/2006">
+    <mc:Choice xmlns:p14="http://schemas.microsoft.com/office/powerpoint/2010/main" Requires="p14">
+      <p:transition p14:dur="0"/>
+    </mc:Choice>
+    <mc:Fallback>
+      <p:transition/>
+    </mc:Fallback>
+  </mc:AlternateContent>
 </p:sld>
 </file>
 
@@ -4634,8 +4849,8 @@
         </p:nvCxnSpPr>
         <p:spPr>
           <a:xfrm flipV="1">
-            <a:off x="1300899" y="4501122"/>
-            <a:ext cx="207390" cy="542218"/>
+            <a:off x="1178350" y="4694547"/>
+            <a:ext cx="254524" cy="456926"/>
           </a:xfrm>
           <a:prstGeom prst="straightConnector1">
             <a:avLst/>
@@ -4805,7 +5020,7 @@
         </p:nvSpPr>
         <p:spPr>
           <a:xfrm>
-            <a:off x="6589174" y="5935662"/>
+            <a:off x="6513760" y="5879095"/>
             <a:ext cx="5269428" cy="369332"/>
           </a:xfrm>
           <a:prstGeom prst="rect">
@@ -4849,6 +5064,355 @@
   <p:clrMapOvr>
     <a:masterClrMapping/>
   </p:clrMapOvr>
+  <mc:AlternateContent xmlns:mc="http://schemas.openxmlformats.org/markup-compatibility/2006">
+    <mc:Choice xmlns:p14="http://schemas.microsoft.com/office/powerpoint/2010/main" Requires="p14">
+      <p:transition p14:dur="0"/>
+    </mc:Choice>
+    <mc:Fallback>
+      <p:transition/>
+    </mc:Fallback>
+  </mc:AlternateContent>
+</p:sld>
+</file>
+
+<file path=ppt/slides/slide7.xml><?xml version="1.0" encoding="utf-8"?>
+<p:sld xmlns:a="http://schemas.openxmlformats.org/drawingml/2006/main" xmlns:r="http://schemas.openxmlformats.org/officeDocument/2006/relationships" xmlns:p="http://schemas.openxmlformats.org/presentationml/2006/main">
+  <p:cSld>
+    <p:spTree>
+      <p:nvGrpSpPr>
+        <p:cNvPr id="1" name="">
+          <a:extLst>
+            <a:ext uri="{FF2B5EF4-FFF2-40B4-BE49-F238E27FC236}">
+              <a16:creationId xmlns:a16="http://schemas.microsoft.com/office/drawing/2014/main" id="{0F1C1A87-9A14-A1C1-36E1-1365275F0E6A}"/>
+            </a:ext>
+          </a:extLst>
+        </p:cNvPr>
+        <p:cNvGrpSpPr/>
+        <p:nvPr/>
+      </p:nvGrpSpPr>
+      <p:grpSpPr>
+        <a:xfrm>
+          <a:off x="0" y="0"/>
+          <a:ext cx="0" cy="0"/>
+          <a:chOff x="0" y="0"/>
+          <a:chExt cx="0" cy="0"/>
+        </a:xfrm>
+      </p:grpSpPr>
+      <p:sp>
+        <p:nvSpPr>
+          <p:cNvPr id="9" name="CuadroTexto 8">
+            <a:extLst>
+              <a:ext uri="{FF2B5EF4-FFF2-40B4-BE49-F238E27FC236}">
+                <a16:creationId xmlns:a16="http://schemas.microsoft.com/office/drawing/2014/main" id="{1490357D-54BF-863D-F2D8-2D86B32C9C86}"/>
+              </a:ext>
+            </a:extLst>
+          </p:cNvPr>
+          <p:cNvSpPr txBox="1"/>
+          <p:nvPr/>
+        </p:nvSpPr>
+        <p:spPr>
+          <a:xfrm>
+            <a:off x="939535" y="994751"/>
+            <a:ext cx="5008778" cy="923330"/>
+          </a:xfrm>
+          <a:prstGeom prst="rect">
+            <a:avLst/>
+          </a:prstGeom>
+          <a:noFill/>
+        </p:spPr>
+        <p:txBody>
+          <a:bodyPr wrap="square">
+            <a:spAutoFit/>
+          </a:bodyPr>
+          <a:lstStyle/>
+          <a:p>
+            <a:pPr algn="just"/>
+            <a:r>
+              <a:rPr lang="es-ES" b="1" dirty="0"/>
+              <a:t>Muchísima oferta → </a:t>
+            </a:r>
+            <a:r>
+              <a:rPr lang="es-ES" dirty="0"/>
+              <a:t>+4.000 alojamientos</a:t>
+            </a:r>
+          </a:p>
+          <a:p>
+            <a:pPr algn="just"/>
+            <a:r>
+              <a:rPr lang="es-ES" dirty="0"/>
+              <a:t>Predominan estudios y espacios pequeños</a:t>
+            </a:r>
+          </a:p>
+          <a:p>
+            <a:pPr algn="just"/>
+            <a:r>
+              <a:rPr lang="es-ES" dirty="0"/>
+              <a:t>Competencia alta → </a:t>
+            </a:r>
+            <a:r>
+              <a:rPr lang="es-ES" b="1" dirty="0"/>
+              <a:t>PRECIOS MAS AJUSTADOS</a:t>
+            </a:r>
+            <a:endParaRPr lang="es-ES" dirty="0"/>
+          </a:p>
+        </p:txBody>
+      </p:sp>
+      <p:sp>
+        <p:nvSpPr>
+          <p:cNvPr id="3" name="CuadroTexto 2">
+            <a:extLst>
+              <a:ext uri="{FF2B5EF4-FFF2-40B4-BE49-F238E27FC236}">
+                <a16:creationId xmlns:a16="http://schemas.microsoft.com/office/drawing/2014/main" id="{ABB29F1D-B816-6419-981A-1D677CEF592D}"/>
+              </a:ext>
+            </a:extLst>
+          </p:cNvPr>
+          <p:cNvSpPr txBox="1"/>
+          <p:nvPr/>
+        </p:nvSpPr>
+        <p:spPr>
+          <a:xfrm>
+            <a:off x="939535" y="2103696"/>
+            <a:ext cx="5008778" cy="1200329"/>
+          </a:xfrm>
+          <a:prstGeom prst="rect">
+            <a:avLst/>
+          </a:prstGeom>
+          <a:noFill/>
+        </p:spPr>
+        <p:txBody>
+          <a:bodyPr wrap="square">
+            <a:spAutoFit/>
+          </a:bodyPr>
+          <a:lstStyle/>
+          <a:p>
+            <a:pPr algn="just"/>
+            <a:r>
+              <a:rPr lang="es-ES" b="1" dirty="0"/>
+              <a:t>Gestión profesional → precios más estables</a:t>
+            </a:r>
+            <a:r>
+              <a:rPr lang="es-ES" dirty="0"/>
+              <a:t> </a:t>
+            </a:r>
+          </a:p>
+          <a:p>
+            <a:pPr algn="just"/>
+            <a:r>
+              <a:rPr lang="es-ES" dirty="0"/>
+              <a:t>En esta zona predominan empresas y gestores profesionales. Su estrategia es mantener precios consistentes para asegurar ocupación.</a:t>
+            </a:r>
+          </a:p>
+        </p:txBody>
+      </p:sp>
+      <p:sp>
+        <p:nvSpPr>
+          <p:cNvPr id="10" name="CuadroTexto 9">
+            <a:extLst>
+              <a:ext uri="{FF2B5EF4-FFF2-40B4-BE49-F238E27FC236}">
+                <a16:creationId xmlns:a16="http://schemas.microsoft.com/office/drawing/2014/main" id="{03FBD882-CCF8-A499-594C-C49C15F41A7A}"/>
+              </a:ext>
+            </a:extLst>
+          </p:cNvPr>
+          <p:cNvSpPr txBox="1"/>
+          <p:nvPr/>
+        </p:nvSpPr>
+        <p:spPr>
+          <a:xfrm>
+            <a:off x="939535" y="3489640"/>
+            <a:ext cx="5008778" cy="1477328"/>
+          </a:xfrm>
+          <a:prstGeom prst="rect">
+            <a:avLst/>
+          </a:prstGeom>
+          <a:noFill/>
+        </p:spPr>
+        <p:txBody>
+          <a:bodyPr wrap="square">
+            <a:spAutoFit/>
+          </a:bodyPr>
+          <a:lstStyle/>
+          <a:p>
+            <a:pPr algn="just"/>
+            <a:r>
+              <a:rPr lang="es-ES" b="1" dirty="0"/>
+              <a:t>Los barrios más caros tienen menos alojamientos y viviendas más amplias</a:t>
+            </a:r>
+            <a:r>
+              <a:rPr lang="es-ES" dirty="0"/>
+              <a:t> </a:t>
+            </a:r>
+          </a:p>
+          <a:p>
+            <a:pPr algn="just"/>
+            <a:r>
+              <a:rPr lang="es-ES" dirty="0"/>
+              <a:t>En estas zonas predominan casas completas y alojamientos de mayor tamaño, lo que eleva el precio típico del barrio.</a:t>
+            </a:r>
+          </a:p>
+        </p:txBody>
+      </p:sp>
+      <p:sp>
+        <p:nvSpPr>
+          <p:cNvPr id="14" name="CuadroTexto 13">
+            <a:extLst>
+              <a:ext uri="{FF2B5EF4-FFF2-40B4-BE49-F238E27FC236}">
+                <a16:creationId xmlns:a16="http://schemas.microsoft.com/office/drawing/2014/main" id="{C6EAD675-5086-D86A-653B-F1A00A81E36D}"/>
+              </a:ext>
+            </a:extLst>
+          </p:cNvPr>
+          <p:cNvSpPr txBox="1"/>
+          <p:nvPr/>
+        </p:nvSpPr>
+        <p:spPr>
+          <a:xfrm>
+            <a:off x="939535" y="5152583"/>
+            <a:ext cx="5156465" cy="1477328"/>
+          </a:xfrm>
+          <a:prstGeom prst="rect">
+            <a:avLst/>
+          </a:prstGeom>
+          <a:noFill/>
+        </p:spPr>
+        <p:txBody>
+          <a:bodyPr wrap="square">
+            <a:spAutoFit/>
+          </a:bodyPr>
+          <a:lstStyle/>
+          <a:p>
+            <a:pPr algn="just"/>
+            <a:r>
+              <a:rPr lang="es-ES" b="1" dirty="0"/>
+              <a:t>Las viviendas de lujo influyen más fuera del Centro</a:t>
+            </a:r>
+            <a:r>
+              <a:rPr lang="es-ES" dirty="0"/>
+              <a:t> </a:t>
+            </a:r>
+          </a:p>
+          <a:p>
+            <a:pPr algn="just"/>
+            <a:r>
+              <a:rPr lang="es-ES" dirty="0"/>
+              <a:t>En barrios (dónde la cantidad de alojamientos es menor), una sola villa puede subir el precio típico de la zona. En el Centro, el volumen de oferta evita este efecto.</a:t>
+            </a:r>
+          </a:p>
+        </p:txBody>
+      </p:sp>
+      <p:sp>
+        <p:nvSpPr>
+          <p:cNvPr id="18" name="CuadroTexto 17">
+            <a:extLst>
+              <a:ext uri="{FF2B5EF4-FFF2-40B4-BE49-F238E27FC236}">
+                <a16:creationId xmlns:a16="http://schemas.microsoft.com/office/drawing/2014/main" id="{6B62E31E-F82E-B9D1-976D-E2948312748F}"/>
+              </a:ext>
+            </a:extLst>
+          </p:cNvPr>
+          <p:cNvSpPr txBox="1"/>
+          <p:nvPr/>
+        </p:nvSpPr>
+        <p:spPr>
+          <a:xfrm>
+            <a:off x="7033963" y="1624585"/>
+            <a:ext cx="4626994" cy="2462213"/>
+          </a:xfrm>
+          <a:prstGeom prst="rect">
+            <a:avLst/>
+          </a:prstGeom>
+          <a:noFill/>
+        </p:spPr>
+        <p:txBody>
+          <a:bodyPr wrap="square">
+            <a:spAutoFit/>
+          </a:bodyPr>
+          <a:lstStyle/>
+          <a:p>
+            <a:r>
+              <a:rPr lang="es-ES" b="1" dirty="0"/>
+              <a:t>                        </a:t>
+            </a:r>
+            <a:r>
+              <a:rPr lang="es-ES" sz="2800" b="1" dirty="0"/>
+              <a:t>CONCLUSIÓN</a:t>
+            </a:r>
+          </a:p>
+          <a:p>
+            <a:endParaRPr lang="es-ES" b="1" dirty="0"/>
+          </a:p>
+          <a:p>
+            <a:endParaRPr lang="es-ES" b="1" dirty="0"/>
+          </a:p>
+          <a:p>
+            <a:pPr algn="just"/>
+            <a:r>
+              <a:rPr lang="es-ES" b="1" dirty="0"/>
+              <a:t>El Centro no es la zona más cara porque su mercado es amplio, competitivo y profesionalizado.</a:t>
+            </a:r>
+            <a:r>
+              <a:rPr lang="es-ES" dirty="0"/>
+              <a:t> </a:t>
+            </a:r>
+            <a:r>
+              <a:rPr lang="es-ES" b="1" dirty="0"/>
+              <a:t>Los barrios con menos oferta y alojamientos más grandes presentan precios más altos.</a:t>
+            </a:r>
+            <a:endParaRPr lang="es-ES" dirty="0"/>
+          </a:p>
+        </p:txBody>
+      </p:sp>
+      <p:sp>
+        <p:nvSpPr>
+          <p:cNvPr id="20" name="CuadroTexto 19">
+            <a:extLst>
+              <a:ext uri="{FF2B5EF4-FFF2-40B4-BE49-F238E27FC236}">
+                <a16:creationId xmlns:a16="http://schemas.microsoft.com/office/drawing/2014/main" id="{9ED7BE66-6EAE-91FC-42B0-6DB0BD480DAD}"/>
+              </a:ext>
+            </a:extLst>
+          </p:cNvPr>
+          <p:cNvSpPr txBox="1"/>
+          <p:nvPr/>
+        </p:nvSpPr>
+        <p:spPr>
+          <a:xfrm>
+            <a:off x="2359059" y="285916"/>
+            <a:ext cx="7331696" cy="523220"/>
+          </a:xfrm>
+          <a:prstGeom prst="rect">
+            <a:avLst/>
+          </a:prstGeom>
+          <a:noFill/>
+        </p:spPr>
+        <p:txBody>
+          <a:bodyPr wrap="square">
+            <a:spAutoFit/>
+          </a:bodyPr>
+          <a:lstStyle/>
+          <a:p>
+            <a:pPr algn="just"/>
+            <a:r>
+              <a:rPr lang="es-ES" sz="2800" b="1" dirty="0"/>
+              <a:t>¿Por qué el Centro NO es la zona más cara?</a:t>
+            </a:r>
+          </a:p>
+        </p:txBody>
+      </p:sp>
+    </p:spTree>
+    <p:extLst>
+      <p:ext uri="{BB962C8B-B14F-4D97-AF65-F5344CB8AC3E}">
+        <p14:creationId xmlns:p14="http://schemas.microsoft.com/office/powerpoint/2010/main" val="1610509037"/>
+      </p:ext>
+    </p:extLst>
+  </p:cSld>
+  <p:clrMapOvr>
+    <a:masterClrMapping/>
+  </p:clrMapOvr>
+  <mc:AlternateContent xmlns:mc="http://schemas.openxmlformats.org/markup-compatibility/2006">
+    <mc:Choice xmlns:p14="http://schemas.microsoft.com/office/powerpoint/2010/main" Requires="p14">
+      <p:transition p14:dur="0"/>
+    </mc:Choice>
+    <mc:Fallback>
+      <p:transition/>
+    </mc:Fallback>
+  </mc:AlternateContent>
 </p:sld>
 </file>
 
